--- a/_static/images/concurrency/Presentation1.pptx
+++ b/_static/images/concurrency/Presentation1.pptx
@@ -26,6 +26,7 @@
     <p:sldId id="274" r:id="rId20"/>
     <p:sldId id="275" r:id="rId21"/>
     <p:sldId id="276" r:id="rId22"/>
+    <p:sldId id="277" r:id="rId23"/>
   </p:sldIdLst>
   <p:sldSz cx="12192000" cy="6858000"/>
   <p:notesSz cx="6858000" cy="9144000"/>
@@ -279,7 +280,7 @@
           <a:p>
             <a:fld id="{8864B806-D088-C24B-BAA0-8204A6CA2F81}" type="datetimeFigureOut">
               <a:rPr lang="en-US" smtClean="0"/>
-              <a:t>9/5/26</a:t>
+              <a:t>9/7/26</a:t>
             </a:fld>
             <a:endParaRPr lang="en-US"/>
           </a:p>
@@ -477,7 +478,7 @@
           <a:p>
             <a:fld id="{8864B806-D088-C24B-BAA0-8204A6CA2F81}" type="datetimeFigureOut">
               <a:rPr lang="en-US" smtClean="0"/>
-              <a:t>9/5/26</a:t>
+              <a:t>9/7/26</a:t>
             </a:fld>
             <a:endParaRPr lang="en-US"/>
           </a:p>
@@ -685,7 +686,7 @@
           <a:p>
             <a:fld id="{8864B806-D088-C24B-BAA0-8204A6CA2F81}" type="datetimeFigureOut">
               <a:rPr lang="en-US" smtClean="0"/>
-              <a:t>9/5/26</a:t>
+              <a:t>9/7/26</a:t>
             </a:fld>
             <a:endParaRPr lang="en-US"/>
           </a:p>
@@ -883,7 +884,7 @@
           <a:p>
             <a:fld id="{8864B806-D088-C24B-BAA0-8204A6CA2F81}" type="datetimeFigureOut">
               <a:rPr lang="en-US" smtClean="0"/>
-              <a:t>9/5/26</a:t>
+              <a:t>9/7/26</a:t>
             </a:fld>
             <a:endParaRPr lang="en-US"/>
           </a:p>
@@ -1158,7 +1159,7 @@
           <a:p>
             <a:fld id="{8864B806-D088-C24B-BAA0-8204A6CA2F81}" type="datetimeFigureOut">
               <a:rPr lang="en-US" smtClean="0"/>
-              <a:t>9/5/26</a:t>
+              <a:t>9/7/26</a:t>
             </a:fld>
             <a:endParaRPr lang="en-US"/>
           </a:p>
@@ -1423,7 +1424,7 @@
           <a:p>
             <a:fld id="{8864B806-D088-C24B-BAA0-8204A6CA2F81}" type="datetimeFigureOut">
               <a:rPr lang="en-US" smtClean="0"/>
-              <a:t>9/5/26</a:t>
+              <a:t>9/7/26</a:t>
             </a:fld>
             <a:endParaRPr lang="en-US"/>
           </a:p>
@@ -1835,7 +1836,7 @@
           <a:p>
             <a:fld id="{8864B806-D088-C24B-BAA0-8204A6CA2F81}" type="datetimeFigureOut">
               <a:rPr lang="en-US" smtClean="0"/>
-              <a:t>9/5/26</a:t>
+              <a:t>9/7/26</a:t>
             </a:fld>
             <a:endParaRPr lang="en-US"/>
           </a:p>
@@ -1976,7 +1977,7 @@
           <a:p>
             <a:fld id="{8864B806-D088-C24B-BAA0-8204A6CA2F81}" type="datetimeFigureOut">
               <a:rPr lang="en-US" smtClean="0"/>
-              <a:t>9/5/26</a:t>
+              <a:t>9/7/26</a:t>
             </a:fld>
             <a:endParaRPr lang="en-US"/>
           </a:p>
@@ -2089,7 +2090,7 @@
           <a:p>
             <a:fld id="{8864B806-D088-C24B-BAA0-8204A6CA2F81}" type="datetimeFigureOut">
               <a:rPr lang="en-US" smtClean="0"/>
-              <a:t>9/5/26</a:t>
+              <a:t>9/7/26</a:t>
             </a:fld>
             <a:endParaRPr lang="en-US"/>
           </a:p>
@@ -2400,7 +2401,7 @@
           <a:p>
             <a:fld id="{8864B806-D088-C24B-BAA0-8204A6CA2F81}" type="datetimeFigureOut">
               <a:rPr lang="en-US" smtClean="0"/>
-              <a:t>9/5/26</a:t>
+              <a:t>9/7/26</a:t>
             </a:fld>
             <a:endParaRPr lang="en-US"/>
           </a:p>
@@ -2688,7 +2689,7 @@
           <a:p>
             <a:fld id="{8864B806-D088-C24B-BAA0-8204A6CA2F81}" type="datetimeFigureOut">
               <a:rPr lang="en-US" smtClean="0"/>
-              <a:t>9/5/26</a:t>
+              <a:t>9/7/26</a:t>
             </a:fld>
             <a:endParaRPr lang="en-US"/>
           </a:p>
@@ -2929,7 +2930,7 @@
           <a:p>
             <a:fld id="{8864B806-D088-C24B-BAA0-8204A6CA2F81}" type="datetimeFigureOut">
               <a:rPr lang="en-US" smtClean="0"/>
-              <a:t>9/5/26</a:t>
+              <a:t>9/7/26</a:t>
             </a:fld>
             <a:endParaRPr lang="en-US"/>
           </a:p>
@@ -18648,6 +18649,1468 @@
 </p:sld>
 </file>
 
+<file path=ppt/slides/slide22.xml><?xml version="1.0" encoding="utf-8"?>
+<p:sld xmlns:a="http://schemas.openxmlformats.org/drawingml/2006/main" xmlns:r="http://schemas.openxmlformats.org/officeDocument/2006/relationships" xmlns:p="http://schemas.openxmlformats.org/presentationml/2006/main">
+  <p:cSld>
+    <p:spTree>
+      <p:nvGrpSpPr>
+        <p:cNvPr id="1" name=""/>
+        <p:cNvGrpSpPr/>
+        <p:nvPr/>
+      </p:nvGrpSpPr>
+      <p:grpSpPr>
+        <a:xfrm>
+          <a:off x="0" y="0"/>
+          <a:ext cx="0" cy="0"/>
+          <a:chOff x="0" y="0"/>
+          <a:chExt cx="0" cy="0"/>
+        </a:xfrm>
+      </p:grpSpPr>
+      <p:sp>
+        <p:nvSpPr>
+          <p:cNvPr id="4" name="Text 0">
+            <a:extLst>
+              <a:ext uri="{FF2B5EF4-FFF2-40B4-BE49-F238E27FC236}">
+                <a16:creationId xmlns:a16="http://schemas.microsoft.com/office/drawing/2014/main" id="{D149E0AD-47D6-F3B2-89A4-7D1F46818FF6}"/>
+              </a:ext>
+            </a:extLst>
+          </p:cNvPr>
+          <p:cNvSpPr/>
+          <p:nvPr/>
+        </p:nvSpPr>
+        <p:spPr>
+          <a:xfrm>
+            <a:off x="457200" y="228600"/>
+            <a:ext cx="11277295" cy="384048"/>
+          </a:xfrm>
+          <a:prstGeom prst="rect">
+            <a:avLst/>
+          </a:prstGeom>
+          <a:noFill/>
+          <a:ln/>
+        </p:spPr>
+        <p:txBody>
+          <a:bodyPr wrap="square" lIns="0" tIns="0" rIns="0" bIns="0" rtlCol="0" anchor="ctr"/>
+          <a:lstStyle/>
+          <a:p>
+            <a:pPr marL="0" indent="0" algn="ctr">
+              <a:buNone/>
+            </a:pPr>
+            <a:r>
+              <a:rPr lang="en-US" sz="3200" b="1" dirty="0">
+                <a:solidFill>
+                  <a:srgbClr val="111827"/>
+                </a:solidFill>
+                <a:latin typeface="Aptos Display" pitchFamily="34" charset="0"/>
+                <a:ea typeface="Aptos Display" pitchFamily="34" charset="-122"/>
+                <a:cs typeface="Aptos Display" pitchFamily="34" charset="-120"/>
+              </a:rPr>
+              <a:t>Object Graph from the Root</a:t>
+            </a:r>
+            <a:endParaRPr lang="en-US" sz="3200" dirty="0"/>
+          </a:p>
+        </p:txBody>
+      </p:sp>
+      <p:sp>
+        <p:nvSpPr>
+          <p:cNvPr id="5" name="Shape 1">
+            <a:extLst>
+              <a:ext uri="{FF2B5EF4-FFF2-40B4-BE49-F238E27FC236}">
+                <a16:creationId xmlns:a16="http://schemas.microsoft.com/office/drawing/2014/main" id="{A13EB8D2-9E1C-C5DB-DE83-503B863620B7}"/>
+              </a:ext>
+            </a:extLst>
+          </p:cNvPr>
+          <p:cNvSpPr/>
+          <p:nvPr/>
+        </p:nvSpPr>
+        <p:spPr>
+          <a:xfrm>
+            <a:off x="6995160" y="1463040"/>
+            <a:ext cx="1356350" cy="486918"/>
+          </a:xfrm>
+          <a:prstGeom prst="line">
+            <a:avLst/>
+          </a:prstGeom>
+          <a:noFill/>
+          <a:ln w="17780">
+            <a:solidFill>
+              <a:srgbClr val="1F2937"/>
+            </a:solidFill>
+            <a:prstDash val="solid"/>
+            <a:headEnd type="none"/>
+            <a:tailEnd type="triangle"/>
+          </a:ln>
+        </p:spPr>
+        <p:txBody>
+          <a:bodyPr/>
+          <a:lstStyle/>
+          <a:p>
+            <a:endParaRPr lang="en-US"/>
+          </a:p>
+        </p:txBody>
+      </p:sp>
+      <p:sp>
+        <p:nvSpPr>
+          <p:cNvPr id="6" name="Text 2">
+            <a:extLst>
+              <a:ext uri="{FF2B5EF4-FFF2-40B4-BE49-F238E27FC236}">
+                <a16:creationId xmlns:a16="http://schemas.microsoft.com/office/drawing/2014/main" id="{7E6785F1-1DB0-8598-0C25-2D2241AC8FF2}"/>
+              </a:ext>
+            </a:extLst>
+          </p:cNvPr>
+          <p:cNvSpPr/>
+          <p:nvPr/>
+        </p:nvSpPr>
+        <p:spPr>
+          <a:xfrm>
+            <a:off x="7702296" y="1477899"/>
+            <a:ext cx="960120" cy="228600"/>
+          </a:xfrm>
+          <a:prstGeom prst="rect">
+            <a:avLst/>
+          </a:prstGeom>
+          <a:noFill/>
+          <a:ln/>
+        </p:spPr>
+        <p:txBody>
+          <a:bodyPr wrap="square" lIns="0" tIns="0" rIns="0" bIns="0" rtlCol="0" anchor="ctr">
+            <a:normAutofit/>
+          </a:bodyPr>
+          <a:lstStyle/>
+          <a:p>
+            <a:pPr marL="0" indent="0" algn="ctr">
+              <a:buNone/>
+            </a:pPr>
+            <a:r>
+              <a:rPr lang="en-US" sz="1300" dirty="0">
+                <a:solidFill>
+                  <a:srgbClr val="4B5563"/>
+                </a:solidFill>
+                <a:latin typeface="Aptos" pitchFamily="34" charset="0"/>
+                <a:ea typeface="Aptos" pitchFamily="34" charset="-122"/>
+                <a:cs typeface="Aptos" pitchFamily="34" charset="-120"/>
+              </a:rPr>
+              <a:t>reference</a:t>
+            </a:r>
+            <a:endParaRPr lang="en-US" sz="1300" dirty="0"/>
+          </a:p>
+        </p:txBody>
+      </p:sp>
+      <p:sp>
+        <p:nvSpPr>
+          <p:cNvPr id="7" name="Shape 3">
+            <a:extLst>
+              <a:ext uri="{FF2B5EF4-FFF2-40B4-BE49-F238E27FC236}">
+                <a16:creationId xmlns:a16="http://schemas.microsoft.com/office/drawing/2014/main" id="{230C3BA2-2184-4024-A05C-E5AA35FFC31D}"/>
+              </a:ext>
+            </a:extLst>
+          </p:cNvPr>
+          <p:cNvSpPr/>
+          <p:nvPr/>
+        </p:nvSpPr>
+        <p:spPr>
+          <a:xfrm>
+            <a:off x="5303520" y="1463040"/>
+            <a:ext cx="0" cy="530352"/>
+          </a:xfrm>
+          <a:prstGeom prst="line">
+            <a:avLst/>
+          </a:prstGeom>
+          <a:noFill/>
+          <a:ln w="17780">
+            <a:solidFill>
+              <a:srgbClr val="1F2937"/>
+            </a:solidFill>
+            <a:prstDash val="solid"/>
+            <a:headEnd type="none"/>
+            <a:tailEnd type="triangle"/>
+          </a:ln>
+        </p:spPr>
+        <p:txBody>
+          <a:bodyPr/>
+          <a:lstStyle/>
+          <a:p>
+            <a:endParaRPr lang="en-US"/>
+          </a:p>
+        </p:txBody>
+      </p:sp>
+      <p:sp>
+        <p:nvSpPr>
+          <p:cNvPr id="8" name="Text 4">
+            <a:extLst>
+              <a:ext uri="{FF2B5EF4-FFF2-40B4-BE49-F238E27FC236}">
+                <a16:creationId xmlns:a16="http://schemas.microsoft.com/office/drawing/2014/main" id="{4CC9D272-4104-32DE-12FC-314ACFFC05ED}"/>
+              </a:ext>
+            </a:extLst>
+          </p:cNvPr>
+          <p:cNvSpPr/>
+          <p:nvPr/>
+        </p:nvSpPr>
+        <p:spPr>
+          <a:xfrm>
+            <a:off x="5303520" y="1609344"/>
+            <a:ext cx="960120" cy="228600"/>
+          </a:xfrm>
+          <a:prstGeom prst="rect">
+            <a:avLst/>
+          </a:prstGeom>
+          <a:noFill/>
+          <a:ln/>
+        </p:spPr>
+        <p:txBody>
+          <a:bodyPr wrap="square" lIns="0" tIns="0" rIns="0" bIns="0" rtlCol="0" anchor="ctr">
+            <a:normAutofit/>
+          </a:bodyPr>
+          <a:lstStyle/>
+          <a:p>
+            <a:pPr marL="0" indent="0" algn="ctr">
+              <a:buNone/>
+            </a:pPr>
+            <a:r>
+              <a:rPr lang="en-US" sz="1300" dirty="0">
+                <a:solidFill>
+                  <a:srgbClr val="4B5563"/>
+                </a:solidFill>
+                <a:latin typeface="Aptos" pitchFamily="34" charset="0"/>
+                <a:ea typeface="Aptos" pitchFamily="34" charset="-122"/>
+                <a:cs typeface="Aptos" pitchFamily="34" charset="-120"/>
+              </a:rPr>
+              <a:t>reference</a:t>
+            </a:r>
+            <a:endParaRPr lang="en-US" sz="1300" dirty="0"/>
+          </a:p>
+        </p:txBody>
+      </p:sp>
+      <p:sp>
+        <p:nvSpPr>
+          <p:cNvPr id="9" name="Shape 5">
+            <a:extLst>
+              <a:ext uri="{FF2B5EF4-FFF2-40B4-BE49-F238E27FC236}">
+                <a16:creationId xmlns:a16="http://schemas.microsoft.com/office/drawing/2014/main" id="{5102BB5B-4EAA-0574-5B7F-397A309FB4BA}"/>
+              </a:ext>
+            </a:extLst>
+          </p:cNvPr>
+          <p:cNvSpPr/>
+          <p:nvPr/>
+        </p:nvSpPr>
+        <p:spPr>
+          <a:xfrm flipH="1">
+            <a:off x="3153156" y="2610612"/>
+            <a:ext cx="1577340" cy="841248"/>
+          </a:xfrm>
+          <a:prstGeom prst="line">
+            <a:avLst/>
+          </a:prstGeom>
+          <a:noFill/>
+          <a:ln w="17780">
+            <a:solidFill>
+              <a:srgbClr val="1F2937"/>
+            </a:solidFill>
+            <a:prstDash val="solid"/>
+            <a:headEnd type="none"/>
+            <a:tailEnd type="triangle"/>
+          </a:ln>
+        </p:spPr>
+        <p:txBody>
+          <a:bodyPr/>
+          <a:lstStyle/>
+          <a:p>
+            <a:endParaRPr lang="en-US"/>
+          </a:p>
+        </p:txBody>
+      </p:sp>
+      <p:sp>
+        <p:nvSpPr>
+          <p:cNvPr id="10" name="Shape 6">
+            <a:extLst>
+              <a:ext uri="{FF2B5EF4-FFF2-40B4-BE49-F238E27FC236}">
+                <a16:creationId xmlns:a16="http://schemas.microsoft.com/office/drawing/2014/main" id="{8B68C770-9D8D-57B7-F1E8-AA36E19FDEDC}"/>
+              </a:ext>
+            </a:extLst>
+          </p:cNvPr>
+          <p:cNvSpPr/>
+          <p:nvPr/>
+        </p:nvSpPr>
+        <p:spPr>
+          <a:xfrm>
+            <a:off x="5571744" y="2610612"/>
+            <a:ext cx="0" cy="749808"/>
+          </a:xfrm>
+          <a:prstGeom prst="line">
+            <a:avLst/>
+          </a:prstGeom>
+          <a:noFill/>
+          <a:ln w="17780">
+            <a:solidFill>
+              <a:srgbClr val="1F2937"/>
+            </a:solidFill>
+            <a:prstDash val="solid"/>
+            <a:headEnd type="none"/>
+            <a:tailEnd type="triangle"/>
+          </a:ln>
+        </p:spPr>
+        <p:txBody>
+          <a:bodyPr/>
+          <a:lstStyle/>
+          <a:p>
+            <a:endParaRPr lang="en-US"/>
+          </a:p>
+        </p:txBody>
+      </p:sp>
+      <p:sp>
+        <p:nvSpPr>
+          <p:cNvPr id="11" name="Shape 7">
+            <a:extLst>
+              <a:ext uri="{FF2B5EF4-FFF2-40B4-BE49-F238E27FC236}">
+                <a16:creationId xmlns:a16="http://schemas.microsoft.com/office/drawing/2014/main" id="{F034A6E2-2AF1-FB38-613A-D5AC3FCAC124}"/>
+              </a:ext>
+            </a:extLst>
+          </p:cNvPr>
+          <p:cNvSpPr/>
+          <p:nvPr/>
+        </p:nvSpPr>
+        <p:spPr>
+          <a:xfrm>
+            <a:off x="6422136" y="2610612"/>
+            <a:ext cx="1410462" cy="749808"/>
+          </a:xfrm>
+          <a:prstGeom prst="line">
+            <a:avLst/>
+          </a:prstGeom>
+          <a:noFill/>
+          <a:ln w="17780">
+            <a:solidFill>
+              <a:srgbClr val="1F2937"/>
+            </a:solidFill>
+            <a:prstDash val="solid"/>
+            <a:headEnd type="none"/>
+            <a:tailEnd type="triangle"/>
+          </a:ln>
+        </p:spPr>
+        <p:txBody>
+          <a:bodyPr/>
+          <a:lstStyle/>
+          <a:p>
+            <a:endParaRPr lang="en-US"/>
+          </a:p>
+        </p:txBody>
+      </p:sp>
+      <p:sp>
+        <p:nvSpPr>
+          <p:cNvPr id="12" name="Shape 8">
+            <a:extLst>
+              <a:ext uri="{FF2B5EF4-FFF2-40B4-BE49-F238E27FC236}">
+                <a16:creationId xmlns:a16="http://schemas.microsoft.com/office/drawing/2014/main" id="{02C52CC9-ED27-2603-03AA-B44BD4576E2C}"/>
+              </a:ext>
+            </a:extLst>
+          </p:cNvPr>
+          <p:cNvSpPr/>
+          <p:nvPr/>
+        </p:nvSpPr>
+        <p:spPr>
+          <a:xfrm>
+            <a:off x="3153156" y="3890772"/>
+            <a:ext cx="0" cy="1088136"/>
+          </a:xfrm>
+          <a:prstGeom prst="line">
+            <a:avLst/>
+          </a:prstGeom>
+          <a:noFill/>
+          <a:ln w="17780">
+            <a:solidFill>
+              <a:srgbClr val="1F2937"/>
+            </a:solidFill>
+            <a:prstDash val="solid"/>
+            <a:headEnd type="none"/>
+            <a:tailEnd type="triangle"/>
+          </a:ln>
+        </p:spPr>
+        <p:txBody>
+          <a:bodyPr/>
+          <a:lstStyle/>
+          <a:p>
+            <a:endParaRPr lang="en-US"/>
+          </a:p>
+        </p:txBody>
+      </p:sp>
+      <p:sp>
+        <p:nvSpPr>
+          <p:cNvPr id="13" name="Shape 9">
+            <a:extLst>
+              <a:ext uri="{FF2B5EF4-FFF2-40B4-BE49-F238E27FC236}">
+                <a16:creationId xmlns:a16="http://schemas.microsoft.com/office/drawing/2014/main" id="{3773CACB-AC1B-5822-DEC8-A50EC24A0462}"/>
+              </a:ext>
+            </a:extLst>
+          </p:cNvPr>
+          <p:cNvSpPr/>
+          <p:nvPr/>
+        </p:nvSpPr>
+        <p:spPr>
+          <a:xfrm>
+            <a:off x="5530596" y="3890772"/>
+            <a:ext cx="0" cy="1088136"/>
+          </a:xfrm>
+          <a:prstGeom prst="line">
+            <a:avLst/>
+          </a:prstGeom>
+          <a:noFill/>
+          <a:ln w="17780">
+            <a:solidFill>
+              <a:srgbClr val="1F2937"/>
+            </a:solidFill>
+            <a:prstDash val="solid"/>
+            <a:headEnd type="none"/>
+            <a:tailEnd type="triangle"/>
+          </a:ln>
+        </p:spPr>
+        <p:txBody>
+          <a:bodyPr/>
+          <a:lstStyle/>
+          <a:p>
+            <a:endParaRPr lang="en-US"/>
+          </a:p>
+        </p:txBody>
+      </p:sp>
+      <p:sp>
+        <p:nvSpPr>
+          <p:cNvPr id="14" name="Shape 10">
+            <a:extLst>
+              <a:ext uri="{FF2B5EF4-FFF2-40B4-BE49-F238E27FC236}">
+                <a16:creationId xmlns:a16="http://schemas.microsoft.com/office/drawing/2014/main" id="{68E239AF-B078-592E-A5C5-B7E102AB7E73}"/>
+              </a:ext>
+            </a:extLst>
+          </p:cNvPr>
+          <p:cNvSpPr/>
+          <p:nvPr/>
+        </p:nvSpPr>
+        <p:spPr>
+          <a:xfrm>
+            <a:off x="7908036" y="3890772"/>
+            <a:ext cx="0" cy="1088136"/>
+          </a:xfrm>
+          <a:prstGeom prst="line">
+            <a:avLst/>
+          </a:prstGeom>
+          <a:noFill/>
+          <a:ln w="17780">
+            <a:solidFill>
+              <a:srgbClr val="1F2937"/>
+            </a:solidFill>
+            <a:prstDash val="solid"/>
+            <a:headEnd type="none"/>
+            <a:tailEnd type="triangle"/>
+          </a:ln>
+        </p:spPr>
+        <p:txBody>
+          <a:bodyPr/>
+          <a:lstStyle/>
+          <a:p>
+            <a:endParaRPr lang="en-US"/>
+          </a:p>
+        </p:txBody>
+      </p:sp>
+      <p:sp>
+        <p:nvSpPr>
+          <p:cNvPr id="15" name="Shape 11">
+            <a:extLst>
+              <a:ext uri="{FF2B5EF4-FFF2-40B4-BE49-F238E27FC236}">
+                <a16:creationId xmlns:a16="http://schemas.microsoft.com/office/drawing/2014/main" id="{F90DD9A8-2994-6DB4-B319-F910EFBA64BC}"/>
+              </a:ext>
+            </a:extLst>
+          </p:cNvPr>
+          <p:cNvSpPr/>
+          <p:nvPr/>
+        </p:nvSpPr>
+        <p:spPr>
+          <a:xfrm>
+            <a:off x="5608320" y="5637276"/>
+            <a:ext cx="402336" cy="219456"/>
+          </a:xfrm>
+          <a:prstGeom prst="line">
+            <a:avLst/>
+          </a:prstGeom>
+          <a:noFill/>
+          <a:ln w="17780">
+            <a:solidFill>
+              <a:srgbClr val="1F2937"/>
+            </a:solidFill>
+            <a:prstDash val="solid"/>
+            <a:headEnd type="none"/>
+            <a:tailEnd type="triangle"/>
+          </a:ln>
+        </p:spPr>
+        <p:txBody>
+          <a:bodyPr/>
+          <a:lstStyle/>
+          <a:p>
+            <a:endParaRPr lang="en-US"/>
+          </a:p>
+        </p:txBody>
+      </p:sp>
+      <p:sp>
+        <p:nvSpPr>
+          <p:cNvPr id="16" name="Shape 12">
+            <a:extLst>
+              <a:ext uri="{FF2B5EF4-FFF2-40B4-BE49-F238E27FC236}">
+                <a16:creationId xmlns:a16="http://schemas.microsoft.com/office/drawing/2014/main" id="{549A60F5-24FB-A0BF-290B-F3E956C9ED8A}"/>
+              </a:ext>
+            </a:extLst>
+          </p:cNvPr>
+          <p:cNvSpPr/>
+          <p:nvPr/>
+        </p:nvSpPr>
+        <p:spPr>
+          <a:xfrm flipH="1">
+            <a:off x="6970776" y="5637276"/>
+            <a:ext cx="813816" cy="256032"/>
+          </a:xfrm>
+          <a:prstGeom prst="line">
+            <a:avLst/>
+          </a:prstGeom>
+          <a:noFill/>
+          <a:ln w="17780">
+            <a:solidFill>
+              <a:srgbClr val="1F2937"/>
+            </a:solidFill>
+            <a:prstDash val="solid"/>
+            <a:headEnd type="none"/>
+            <a:tailEnd type="triangle"/>
+          </a:ln>
+        </p:spPr>
+        <p:txBody>
+          <a:bodyPr/>
+          <a:lstStyle/>
+          <a:p>
+            <a:endParaRPr lang="en-US"/>
+          </a:p>
+        </p:txBody>
+      </p:sp>
+      <p:sp>
+        <p:nvSpPr>
+          <p:cNvPr id="17" name="Shape 13">
+            <a:extLst>
+              <a:ext uri="{FF2B5EF4-FFF2-40B4-BE49-F238E27FC236}">
+                <a16:creationId xmlns:a16="http://schemas.microsoft.com/office/drawing/2014/main" id="{3CB69140-1CCE-9B78-34C4-53D3A873D2AF}"/>
+              </a:ext>
+            </a:extLst>
+          </p:cNvPr>
+          <p:cNvSpPr/>
+          <p:nvPr/>
+        </p:nvSpPr>
+        <p:spPr>
+          <a:xfrm>
+            <a:off x="8662416" y="3525012"/>
+            <a:ext cx="960120" cy="45720"/>
+          </a:xfrm>
+          <a:prstGeom prst="line">
+            <a:avLst/>
+          </a:prstGeom>
+          <a:noFill/>
+          <a:ln w="17780">
+            <a:solidFill>
+              <a:srgbClr val="1F2937"/>
+            </a:solidFill>
+            <a:prstDash val="solid"/>
+            <a:headEnd type="none"/>
+            <a:tailEnd type="triangle"/>
+          </a:ln>
+        </p:spPr>
+        <p:txBody>
+          <a:bodyPr/>
+          <a:lstStyle/>
+          <a:p>
+            <a:endParaRPr lang="en-US"/>
+          </a:p>
+        </p:txBody>
+      </p:sp>
+      <p:sp>
+        <p:nvSpPr>
+          <p:cNvPr id="18" name="Shape 14">
+            <a:extLst>
+              <a:ext uri="{FF2B5EF4-FFF2-40B4-BE49-F238E27FC236}">
+                <a16:creationId xmlns:a16="http://schemas.microsoft.com/office/drawing/2014/main" id="{EF2EBC87-8135-29E0-D7C6-5043F258B822}"/>
+              </a:ext>
+            </a:extLst>
+          </p:cNvPr>
+          <p:cNvSpPr/>
+          <p:nvPr/>
+        </p:nvSpPr>
+        <p:spPr>
+          <a:xfrm flipH="1" flipV="1">
+            <a:off x="8647176" y="3753612"/>
+            <a:ext cx="975360" cy="64008"/>
+          </a:xfrm>
+          <a:prstGeom prst="line">
+            <a:avLst/>
+          </a:prstGeom>
+          <a:noFill/>
+          <a:ln w="17780">
+            <a:solidFill>
+              <a:srgbClr val="1F2937"/>
+            </a:solidFill>
+            <a:prstDash val="solid"/>
+            <a:headEnd type="none"/>
+            <a:tailEnd type="triangle"/>
+          </a:ln>
+        </p:spPr>
+        <p:txBody>
+          <a:bodyPr/>
+          <a:lstStyle/>
+          <a:p>
+            <a:endParaRPr lang="en-US"/>
+          </a:p>
+        </p:txBody>
+      </p:sp>
+      <p:sp>
+        <p:nvSpPr>
+          <p:cNvPr id="19" name="Text 15">
+            <a:extLst>
+              <a:ext uri="{FF2B5EF4-FFF2-40B4-BE49-F238E27FC236}">
+                <a16:creationId xmlns:a16="http://schemas.microsoft.com/office/drawing/2014/main" id="{BFC83FDD-4C45-A706-A776-254763C24AA2}"/>
+              </a:ext>
+            </a:extLst>
+          </p:cNvPr>
+          <p:cNvSpPr/>
+          <p:nvPr/>
+        </p:nvSpPr>
+        <p:spPr>
+          <a:xfrm>
+            <a:off x="8799576" y="3232404"/>
+            <a:ext cx="685800" cy="228600"/>
+          </a:xfrm>
+          <a:prstGeom prst="rect">
+            <a:avLst/>
+          </a:prstGeom>
+          <a:noFill/>
+          <a:ln/>
+        </p:spPr>
+        <p:txBody>
+          <a:bodyPr wrap="square" lIns="0" tIns="0" rIns="0" bIns="0" rtlCol="0" anchor="ctr">
+            <a:normAutofit/>
+          </a:bodyPr>
+          <a:lstStyle/>
+          <a:p>
+            <a:pPr marL="0" indent="0" algn="ctr">
+              <a:buNone/>
+            </a:pPr>
+            <a:r>
+              <a:rPr lang="en-US" sz="1250" dirty="0">
+                <a:solidFill>
+                  <a:srgbClr val="4B5563"/>
+                </a:solidFill>
+                <a:latin typeface="Aptos" pitchFamily="34" charset="0"/>
+                <a:ea typeface="Aptos" pitchFamily="34" charset="-122"/>
+                <a:cs typeface="Aptos" pitchFamily="34" charset="-120"/>
+              </a:rPr>
+              <a:t>cycle</a:t>
+            </a:r>
+            <a:endParaRPr lang="en-US" sz="1250" dirty="0"/>
+          </a:p>
+        </p:txBody>
+      </p:sp>
+      <p:sp>
+        <p:nvSpPr>
+          <p:cNvPr id="20" name="Text 16">
+            <a:extLst>
+              <a:ext uri="{FF2B5EF4-FFF2-40B4-BE49-F238E27FC236}">
+                <a16:creationId xmlns:a16="http://schemas.microsoft.com/office/drawing/2014/main" id="{E9E2FFE0-E281-9003-2B6F-560C951C72DE}"/>
+              </a:ext>
+            </a:extLst>
+          </p:cNvPr>
+          <p:cNvSpPr/>
+          <p:nvPr/>
+        </p:nvSpPr>
+        <p:spPr>
+          <a:xfrm>
+            <a:off x="4389120" y="868680"/>
+            <a:ext cx="2926080" cy="566928"/>
+          </a:xfrm>
+          <a:prstGeom prst="rect">
+            <a:avLst/>
+          </a:prstGeom>
+          <a:solidFill>
+            <a:srgbClr val="BFEFD0"/>
+          </a:solidFill>
+          <a:ln w="19050">
+            <a:solidFill>
+              <a:srgbClr val="2E7D32"/>
+            </a:solidFill>
+          </a:ln>
+          <a:effectLst>
+            <a:outerShdw blurRad="12700" dist="50800" dir="2700000" algn="bl" rotWithShape="0">
+              <a:srgbClr val="000000">
+                <a:alpha val="12000"/>
+              </a:srgbClr>
+            </a:outerShdw>
+          </a:effectLst>
+        </p:spPr>
+        <p:txBody>
+          <a:bodyPr wrap="square" lIns="635" tIns="635" rIns="635" bIns="635" rtlCol="0" anchor="ctr">
+            <a:normAutofit/>
+          </a:bodyPr>
+          <a:lstStyle/>
+          <a:p>
+            <a:pPr marL="0" indent="0" algn="ctr">
+              <a:buNone/>
+            </a:pPr>
+            <a:r>
+              <a:rPr lang="en-US" sz="2400" b="1" dirty="0">
+                <a:solidFill>
+                  <a:srgbClr val="111827"/>
+                </a:solidFill>
+                <a:latin typeface="Aptos" pitchFamily="34" charset="0"/>
+                <a:ea typeface="Aptos" pitchFamily="34" charset="-122"/>
+                <a:cs typeface="Aptos" pitchFamily="34" charset="-120"/>
+              </a:rPr>
+              <a:t>Root: TaskList</a:t>
+            </a:r>
+            <a:endParaRPr lang="en-US" sz="2400" dirty="0"/>
+          </a:p>
+        </p:txBody>
+      </p:sp>
+      <p:sp>
+        <p:nvSpPr>
+          <p:cNvPr id="21" name="Text 17">
+            <a:extLst>
+              <a:ext uri="{FF2B5EF4-FFF2-40B4-BE49-F238E27FC236}">
+                <a16:creationId xmlns:a16="http://schemas.microsoft.com/office/drawing/2014/main" id="{E0579264-FC14-3112-4E1D-1B2A44277B6D}"/>
+              </a:ext>
+            </a:extLst>
+          </p:cNvPr>
+          <p:cNvSpPr/>
+          <p:nvPr/>
+        </p:nvSpPr>
+        <p:spPr>
+          <a:xfrm>
+            <a:off x="7748016" y="1949958"/>
+            <a:ext cx="2194560" cy="621792"/>
+          </a:xfrm>
+          <a:prstGeom prst="rect">
+            <a:avLst/>
+          </a:prstGeom>
+          <a:solidFill>
+            <a:srgbClr val="FFD3A5"/>
+          </a:solidFill>
+          <a:ln w="19050">
+            <a:solidFill>
+              <a:srgbClr val="C56A12"/>
+            </a:solidFill>
+          </a:ln>
+          <a:effectLst>
+            <a:outerShdw blurRad="12700" dist="50800" dir="2700000" algn="bl" rotWithShape="0">
+              <a:srgbClr val="000000">
+                <a:alpha val="12000"/>
+              </a:srgbClr>
+            </a:outerShdw>
+          </a:effectLst>
+        </p:spPr>
+        <p:txBody>
+          <a:bodyPr wrap="square" lIns="635" tIns="635" rIns="635" bIns="635" rtlCol="0" anchor="ctr">
+            <a:normAutofit/>
+          </a:bodyPr>
+          <a:lstStyle/>
+          <a:p>
+            <a:pPr marL="0" indent="0" algn="ctr">
+              <a:buNone/>
+            </a:pPr>
+            <a:r>
+              <a:rPr lang="en-US" sz="1800" b="1" dirty="0">
+                <a:solidFill>
+                  <a:srgbClr val="111827"/>
+                </a:solidFill>
+                <a:latin typeface="Aptos" pitchFamily="34" charset="0"/>
+                <a:ea typeface="Aptos" pitchFamily="34" charset="-122"/>
+                <a:cs typeface="Aptos" pitchFamily="34" charset="-120"/>
+              </a:rPr>
+              <a:t>String name</a:t>
+            </a:r>
+            <a:endParaRPr lang="en-US" sz="1800" dirty="0"/>
+          </a:p>
+          <a:p>
+            <a:pPr marL="0" indent="0" algn="ctr">
+              <a:buNone/>
+            </a:pPr>
+            <a:r>
+              <a:rPr lang="en-US" sz="1800" b="1" dirty="0">
+                <a:solidFill>
+                  <a:srgbClr val="111827"/>
+                </a:solidFill>
+                <a:latin typeface="Aptos" pitchFamily="34" charset="0"/>
+                <a:ea typeface="Aptos" pitchFamily="34" charset="-122"/>
+                <a:cs typeface="Aptos" pitchFamily="34" charset="-120"/>
+              </a:rPr>
+              <a:t>"CS Tasks"</a:t>
+            </a:r>
+            <a:endParaRPr lang="en-US" sz="1800" dirty="0"/>
+          </a:p>
+        </p:txBody>
+      </p:sp>
+      <p:sp>
+        <p:nvSpPr>
+          <p:cNvPr id="22" name="Text 18">
+            <a:extLst>
+              <a:ext uri="{FF2B5EF4-FFF2-40B4-BE49-F238E27FC236}">
+                <a16:creationId xmlns:a16="http://schemas.microsoft.com/office/drawing/2014/main" id="{DD57C274-8DE9-52FA-DC5E-9320EF96F550}"/>
+              </a:ext>
+            </a:extLst>
+          </p:cNvPr>
+          <p:cNvSpPr/>
+          <p:nvPr/>
+        </p:nvSpPr>
+        <p:spPr>
+          <a:xfrm>
+            <a:off x="3998976" y="1988820"/>
+            <a:ext cx="3154680" cy="621792"/>
+          </a:xfrm>
+          <a:prstGeom prst="rect">
+            <a:avLst/>
+          </a:prstGeom>
+          <a:solidFill>
+            <a:srgbClr val="FFD3A5"/>
+          </a:solidFill>
+          <a:ln w="19050">
+            <a:solidFill>
+              <a:srgbClr val="C56A12"/>
+            </a:solidFill>
+          </a:ln>
+          <a:effectLst>
+            <a:outerShdw blurRad="12700" dist="50800" dir="2700000" algn="bl" rotWithShape="0">
+              <a:srgbClr val="000000">
+                <a:alpha val="12000"/>
+              </a:srgbClr>
+            </a:outerShdw>
+          </a:effectLst>
+        </p:spPr>
+        <p:txBody>
+          <a:bodyPr wrap="square" lIns="635" tIns="635" rIns="635" bIns="635" rtlCol="0" anchor="ctr">
+            <a:normAutofit/>
+          </a:bodyPr>
+          <a:lstStyle/>
+          <a:p>
+            <a:pPr marL="0" indent="0" algn="ctr">
+              <a:buNone/>
+            </a:pPr>
+            <a:r>
+              <a:rPr lang="en-US" sz="2000" b="1" dirty="0">
+                <a:solidFill>
+                  <a:srgbClr val="111827"/>
+                </a:solidFill>
+                <a:latin typeface="Aptos" pitchFamily="34" charset="0"/>
+                <a:ea typeface="Aptos" pitchFamily="34" charset="-122"/>
+                <a:cs typeface="Aptos" pitchFamily="34" charset="-120"/>
+              </a:rPr>
+              <a:t>ArrayList&lt;Task&gt; tasks</a:t>
+            </a:r>
+            <a:endParaRPr lang="en-US" sz="2000" dirty="0"/>
+          </a:p>
+        </p:txBody>
+      </p:sp>
+      <p:sp>
+        <p:nvSpPr>
+          <p:cNvPr id="23" name="Text 19">
+            <a:extLst>
+              <a:ext uri="{FF2B5EF4-FFF2-40B4-BE49-F238E27FC236}">
+                <a16:creationId xmlns:a16="http://schemas.microsoft.com/office/drawing/2014/main" id="{D14EBAB5-0A02-8C10-BED9-BCE71EDC9205}"/>
+              </a:ext>
+            </a:extLst>
+          </p:cNvPr>
+          <p:cNvSpPr/>
+          <p:nvPr/>
+        </p:nvSpPr>
+        <p:spPr>
+          <a:xfrm>
+            <a:off x="2398776" y="3360420"/>
+            <a:ext cx="1508760" cy="530352"/>
+          </a:xfrm>
+          <a:prstGeom prst="rect">
+            <a:avLst/>
+          </a:prstGeom>
+          <a:solidFill>
+            <a:srgbClr val="C7E4FF"/>
+          </a:solidFill>
+          <a:ln w="19050">
+            <a:solidFill>
+              <a:srgbClr val="1D6DA8"/>
+            </a:solidFill>
+          </a:ln>
+          <a:effectLst>
+            <a:outerShdw blurRad="12700" dist="50800" dir="2700000" algn="bl" rotWithShape="0">
+              <a:srgbClr val="000000">
+                <a:alpha val="12000"/>
+              </a:srgbClr>
+            </a:outerShdw>
+          </a:effectLst>
+        </p:spPr>
+        <p:txBody>
+          <a:bodyPr wrap="square" lIns="635" tIns="635" rIns="635" bIns="635" rtlCol="0" anchor="ctr">
+            <a:normAutofit/>
+          </a:bodyPr>
+          <a:lstStyle/>
+          <a:p>
+            <a:pPr marL="0" indent="0" algn="ctr">
+              <a:buNone/>
+            </a:pPr>
+            <a:r>
+              <a:rPr lang="en-US" sz="1900" b="1" dirty="0">
+                <a:solidFill>
+                  <a:srgbClr val="111827"/>
+                </a:solidFill>
+                <a:latin typeface="Aptos" pitchFamily="34" charset="0"/>
+                <a:ea typeface="Aptos" pitchFamily="34" charset="-122"/>
+                <a:cs typeface="Aptos" pitchFamily="34" charset="-120"/>
+              </a:rPr>
+              <a:t>Task A</a:t>
+            </a:r>
+            <a:endParaRPr lang="en-US" sz="1900" dirty="0"/>
+          </a:p>
+        </p:txBody>
+      </p:sp>
+      <p:sp>
+        <p:nvSpPr>
+          <p:cNvPr id="24" name="Text 20">
+            <a:extLst>
+              <a:ext uri="{FF2B5EF4-FFF2-40B4-BE49-F238E27FC236}">
+                <a16:creationId xmlns:a16="http://schemas.microsoft.com/office/drawing/2014/main" id="{8995D998-7353-EDDF-AA9F-F909AEE8B406}"/>
+              </a:ext>
+            </a:extLst>
+          </p:cNvPr>
+          <p:cNvSpPr/>
+          <p:nvPr/>
+        </p:nvSpPr>
+        <p:spPr>
+          <a:xfrm>
+            <a:off x="4776216" y="3360420"/>
+            <a:ext cx="1508760" cy="530352"/>
+          </a:xfrm>
+          <a:prstGeom prst="rect">
+            <a:avLst/>
+          </a:prstGeom>
+          <a:solidFill>
+            <a:srgbClr val="C7E4FF"/>
+          </a:solidFill>
+          <a:ln w="19050">
+            <a:solidFill>
+              <a:srgbClr val="1D6DA8"/>
+            </a:solidFill>
+          </a:ln>
+          <a:effectLst>
+            <a:outerShdw blurRad="12700" dist="50800" dir="2700000" algn="bl" rotWithShape="0">
+              <a:srgbClr val="000000">
+                <a:alpha val="12000"/>
+              </a:srgbClr>
+            </a:outerShdw>
+          </a:effectLst>
+        </p:spPr>
+        <p:txBody>
+          <a:bodyPr wrap="square" lIns="635" tIns="635" rIns="635" bIns="635" rtlCol="0" anchor="ctr">
+            <a:normAutofit/>
+          </a:bodyPr>
+          <a:lstStyle/>
+          <a:p>
+            <a:pPr marL="0" indent="0" algn="ctr">
+              <a:buNone/>
+            </a:pPr>
+            <a:r>
+              <a:rPr lang="en-US" sz="1900" b="1" dirty="0">
+                <a:solidFill>
+                  <a:srgbClr val="111827"/>
+                </a:solidFill>
+                <a:latin typeface="Aptos" pitchFamily="34" charset="0"/>
+                <a:ea typeface="Aptos" pitchFamily="34" charset="-122"/>
+                <a:cs typeface="Aptos" pitchFamily="34" charset="-120"/>
+              </a:rPr>
+              <a:t>Task B</a:t>
+            </a:r>
+            <a:endParaRPr lang="en-US" sz="1900" dirty="0"/>
+          </a:p>
+        </p:txBody>
+      </p:sp>
+      <p:sp>
+        <p:nvSpPr>
+          <p:cNvPr id="25" name="Text 21">
+            <a:extLst>
+              <a:ext uri="{FF2B5EF4-FFF2-40B4-BE49-F238E27FC236}">
+                <a16:creationId xmlns:a16="http://schemas.microsoft.com/office/drawing/2014/main" id="{DEAF75F9-A00B-4D8B-737F-E62891FC527B}"/>
+              </a:ext>
+            </a:extLst>
+          </p:cNvPr>
+          <p:cNvSpPr/>
+          <p:nvPr/>
+        </p:nvSpPr>
+        <p:spPr>
+          <a:xfrm>
+            <a:off x="7153656" y="3360420"/>
+            <a:ext cx="1508760" cy="530352"/>
+          </a:xfrm>
+          <a:prstGeom prst="rect">
+            <a:avLst/>
+          </a:prstGeom>
+          <a:solidFill>
+            <a:srgbClr val="C7E4FF"/>
+          </a:solidFill>
+          <a:ln w="19050">
+            <a:solidFill>
+              <a:srgbClr val="1D6DA8"/>
+            </a:solidFill>
+          </a:ln>
+          <a:effectLst>
+            <a:outerShdw blurRad="12700" dist="50800" dir="2700000" algn="bl" rotWithShape="0">
+              <a:srgbClr val="000000">
+                <a:alpha val="12000"/>
+              </a:srgbClr>
+            </a:outerShdw>
+          </a:effectLst>
+        </p:spPr>
+        <p:txBody>
+          <a:bodyPr wrap="square" lIns="635" tIns="635" rIns="635" bIns="635" rtlCol="0" anchor="ctr">
+            <a:normAutofit/>
+          </a:bodyPr>
+          <a:lstStyle/>
+          <a:p>
+            <a:pPr marL="0" indent="0" algn="ctr">
+              <a:buNone/>
+            </a:pPr>
+            <a:r>
+              <a:rPr lang="en-US" sz="1900" b="1" dirty="0">
+                <a:solidFill>
+                  <a:srgbClr val="111827"/>
+                </a:solidFill>
+                <a:latin typeface="Aptos" pitchFamily="34" charset="0"/>
+                <a:ea typeface="Aptos" pitchFamily="34" charset="-122"/>
+                <a:cs typeface="Aptos" pitchFamily="34" charset="-120"/>
+              </a:rPr>
+              <a:t>Task C</a:t>
+            </a:r>
+            <a:endParaRPr lang="en-US" sz="1900" dirty="0"/>
+          </a:p>
+        </p:txBody>
+      </p:sp>
+      <p:sp>
+        <p:nvSpPr>
+          <p:cNvPr id="26" name="Text 22">
+            <a:extLst>
+              <a:ext uri="{FF2B5EF4-FFF2-40B4-BE49-F238E27FC236}">
+                <a16:creationId xmlns:a16="http://schemas.microsoft.com/office/drawing/2014/main" id="{480D2384-4CD6-B4EB-214A-3BD657C562C7}"/>
+              </a:ext>
+            </a:extLst>
+          </p:cNvPr>
+          <p:cNvSpPr/>
+          <p:nvPr/>
+        </p:nvSpPr>
+        <p:spPr>
+          <a:xfrm>
+            <a:off x="2124456" y="4978908"/>
+            <a:ext cx="2011680" cy="621792"/>
+          </a:xfrm>
+          <a:prstGeom prst="rect">
+            <a:avLst/>
+          </a:prstGeom>
+          <a:solidFill>
+            <a:srgbClr val="FFD1E1"/>
+          </a:solidFill>
+          <a:ln w="19050">
+            <a:solidFill>
+              <a:srgbClr val="C84361"/>
+            </a:solidFill>
+          </a:ln>
+          <a:effectLst>
+            <a:outerShdw blurRad="12700" dist="50800" dir="2700000" algn="bl" rotWithShape="0">
+              <a:srgbClr val="000000">
+                <a:alpha val="12000"/>
+              </a:srgbClr>
+            </a:outerShdw>
+          </a:effectLst>
+        </p:spPr>
+        <p:txBody>
+          <a:bodyPr wrap="square" lIns="635" tIns="635" rIns="635" bIns="635" rtlCol="0" anchor="ctr">
+            <a:normAutofit/>
+          </a:bodyPr>
+          <a:lstStyle/>
+          <a:p>
+            <a:pPr marL="0" indent="0" algn="ctr">
+              <a:buNone/>
+            </a:pPr>
+            <a:r>
+              <a:rPr lang="en-US" sz="1700" b="1" dirty="0">
+                <a:solidFill>
+                  <a:srgbClr val="111827"/>
+                </a:solidFill>
+                <a:latin typeface="Aptos" pitchFamily="34" charset="0"/>
+                <a:ea typeface="Aptos" pitchFamily="34" charset="-122"/>
+                <a:cs typeface="Aptos" pitchFamily="34" charset="-120"/>
+              </a:rPr>
+              <a:t>String title</a:t>
+            </a:r>
+            <a:endParaRPr lang="en-US" sz="1700" dirty="0"/>
+          </a:p>
+          <a:p>
+            <a:pPr marL="0" indent="0" algn="ctr">
+              <a:buNone/>
+            </a:pPr>
+            <a:r>
+              <a:rPr lang="en-US" sz="1700" b="1" dirty="0">
+                <a:solidFill>
+                  <a:srgbClr val="111827"/>
+                </a:solidFill>
+                <a:latin typeface="Aptos" pitchFamily="34" charset="0"/>
+                <a:ea typeface="Aptos" pitchFamily="34" charset="-122"/>
+                <a:cs typeface="Aptos" pitchFamily="34" charset="-120"/>
+              </a:rPr>
+              <a:t>"Read chapter"</a:t>
+            </a:r>
+            <a:endParaRPr lang="en-US" sz="1700" dirty="0"/>
+          </a:p>
+        </p:txBody>
+      </p:sp>
+      <p:sp>
+        <p:nvSpPr>
+          <p:cNvPr id="27" name="Text 23">
+            <a:extLst>
+              <a:ext uri="{FF2B5EF4-FFF2-40B4-BE49-F238E27FC236}">
+                <a16:creationId xmlns:a16="http://schemas.microsoft.com/office/drawing/2014/main" id="{7F15B822-C943-786F-0EC5-3E8DE4E5880B}"/>
+              </a:ext>
+            </a:extLst>
+          </p:cNvPr>
+          <p:cNvSpPr/>
+          <p:nvPr/>
+        </p:nvSpPr>
+        <p:spPr>
+          <a:xfrm>
+            <a:off x="4501896" y="4978908"/>
+            <a:ext cx="2011680" cy="621792"/>
+          </a:xfrm>
+          <a:prstGeom prst="rect">
+            <a:avLst/>
+          </a:prstGeom>
+          <a:solidFill>
+            <a:srgbClr val="FFD1E1"/>
+          </a:solidFill>
+          <a:ln w="19050">
+            <a:solidFill>
+              <a:srgbClr val="C84361"/>
+            </a:solidFill>
+          </a:ln>
+          <a:effectLst>
+            <a:outerShdw blurRad="12700" dist="50800" dir="2700000" algn="bl" rotWithShape="0">
+              <a:srgbClr val="000000">
+                <a:alpha val="12000"/>
+              </a:srgbClr>
+            </a:outerShdw>
+          </a:effectLst>
+        </p:spPr>
+        <p:txBody>
+          <a:bodyPr wrap="square" lIns="635" tIns="635" rIns="635" bIns="635" rtlCol="0" anchor="ctr">
+            <a:normAutofit/>
+          </a:bodyPr>
+          <a:lstStyle/>
+          <a:p>
+            <a:pPr marL="0" indent="0" algn="ctr">
+              <a:buNone/>
+            </a:pPr>
+            <a:r>
+              <a:rPr lang="en-US" sz="1700" b="1" dirty="0">
+                <a:solidFill>
+                  <a:srgbClr val="111827"/>
+                </a:solidFill>
+                <a:latin typeface="Aptos" pitchFamily="34" charset="0"/>
+                <a:ea typeface="Aptos" pitchFamily="34" charset="-122"/>
+                <a:cs typeface="Aptos" pitchFamily="34" charset="-120"/>
+              </a:rPr>
+              <a:t>String title</a:t>
+            </a:r>
+            <a:endParaRPr lang="en-US" sz="1700" dirty="0"/>
+          </a:p>
+          <a:p>
+            <a:pPr marL="0" indent="0" algn="ctr">
+              <a:buNone/>
+            </a:pPr>
+            <a:r>
+              <a:rPr lang="en-US" sz="1700" b="1" dirty="0">
+                <a:solidFill>
+                  <a:srgbClr val="111827"/>
+                </a:solidFill>
+                <a:latin typeface="Aptos" pitchFamily="34" charset="0"/>
+                <a:ea typeface="Aptos" pitchFamily="34" charset="-122"/>
+                <a:cs typeface="Aptos" pitchFamily="34" charset="-120"/>
+              </a:rPr>
+              <a:t>"Write code"</a:t>
+            </a:r>
+            <a:endParaRPr lang="en-US" sz="1700" dirty="0"/>
+          </a:p>
+        </p:txBody>
+      </p:sp>
+      <p:sp>
+        <p:nvSpPr>
+          <p:cNvPr id="28" name="Text 24">
+            <a:extLst>
+              <a:ext uri="{FF2B5EF4-FFF2-40B4-BE49-F238E27FC236}">
+                <a16:creationId xmlns:a16="http://schemas.microsoft.com/office/drawing/2014/main" id="{582A3669-C990-255F-628B-F48AEECAB3AF}"/>
+              </a:ext>
+            </a:extLst>
+          </p:cNvPr>
+          <p:cNvSpPr/>
+          <p:nvPr/>
+        </p:nvSpPr>
+        <p:spPr>
+          <a:xfrm>
+            <a:off x="6879336" y="4978908"/>
+            <a:ext cx="2011680" cy="621792"/>
+          </a:xfrm>
+          <a:prstGeom prst="rect">
+            <a:avLst/>
+          </a:prstGeom>
+          <a:solidFill>
+            <a:srgbClr val="FFD1E1"/>
+          </a:solidFill>
+          <a:ln w="19050">
+            <a:solidFill>
+              <a:srgbClr val="C84361"/>
+            </a:solidFill>
+          </a:ln>
+          <a:effectLst>
+            <a:outerShdw blurRad="12700" dist="50800" dir="2700000" algn="bl" rotWithShape="0">
+              <a:srgbClr val="000000">
+                <a:alpha val="12000"/>
+              </a:srgbClr>
+            </a:outerShdw>
+          </a:effectLst>
+        </p:spPr>
+        <p:txBody>
+          <a:bodyPr wrap="square" lIns="635" tIns="635" rIns="635" bIns="635" rtlCol="0" anchor="ctr">
+            <a:normAutofit/>
+          </a:bodyPr>
+          <a:lstStyle/>
+          <a:p>
+            <a:pPr marL="0" indent="0" algn="ctr">
+              <a:buNone/>
+            </a:pPr>
+            <a:r>
+              <a:rPr lang="en-US" sz="1700" b="1" dirty="0">
+                <a:solidFill>
+                  <a:srgbClr val="111827"/>
+                </a:solidFill>
+                <a:latin typeface="Aptos" pitchFamily="34" charset="0"/>
+                <a:ea typeface="Aptos" pitchFamily="34" charset="-122"/>
+                <a:cs typeface="Aptos" pitchFamily="34" charset="-120"/>
+              </a:rPr>
+              <a:t>String title</a:t>
+            </a:r>
+            <a:endParaRPr lang="en-US" sz="1700" dirty="0"/>
+          </a:p>
+          <a:p>
+            <a:pPr marL="0" indent="0" algn="ctr">
+              <a:buNone/>
+            </a:pPr>
+            <a:r>
+              <a:rPr lang="en-US" sz="1700" b="1" dirty="0">
+                <a:solidFill>
+                  <a:srgbClr val="111827"/>
+                </a:solidFill>
+                <a:latin typeface="Aptos" pitchFamily="34" charset="0"/>
+                <a:ea typeface="Aptos" pitchFamily="34" charset="-122"/>
+                <a:cs typeface="Aptos" pitchFamily="34" charset="-120"/>
+              </a:rPr>
+              <a:t>"Study for quiz"</a:t>
+            </a:r>
+            <a:endParaRPr lang="en-US" sz="1700" dirty="0"/>
+          </a:p>
+        </p:txBody>
+      </p:sp>
+      <p:sp>
+        <p:nvSpPr>
+          <p:cNvPr id="29" name="Text 25">
+            <a:extLst>
+              <a:ext uri="{FF2B5EF4-FFF2-40B4-BE49-F238E27FC236}">
+                <a16:creationId xmlns:a16="http://schemas.microsoft.com/office/drawing/2014/main" id="{1B4D678A-C3AF-EA4B-4DD6-79D9F5B97541}"/>
+              </a:ext>
+            </a:extLst>
+          </p:cNvPr>
+          <p:cNvSpPr/>
+          <p:nvPr/>
+        </p:nvSpPr>
+        <p:spPr>
+          <a:xfrm>
+            <a:off x="5599176" y="5893308"/>
+            <a:ext cx="1691640" cy="502920"/>
+          </a:xfrm>
+          <a:prstGeom prst="rect">
+            <a:avLst/>
+          </a:prstGeom>
+          <a:solidFill>
+            <a:srgbClr val="DAC8FF"/>
+          </a:solidFill>
+          <a:ln w="19050">
+            <a:solidFill>
+              <a:srgbClr val="6B4CBF"/>
+            </a:solidFill>
+          </a:ln>
+          <a:effectLst>
+            <a:outerShdw blurRad="12700" dist="50800" dir="2700000" algn="bl" rotWithShape="0">
+              <a:srgbClr val="000000">
+                <a:alpha val="12000"/>
+              </a:srgbClr>
+            </a:outerShdw>
+          </a:effectLst>
+        </p:spPr>
+        <p:txBody>
+          <a:bodyPr wrap="square" lIns="635" tIns="635" rIns="635" bIns="635" rtlCol="0" anchor="ctr">
+            <a:normAutofit lnSpcReduction="10000"/>
+          </a:bodyPr>
+          <a:lstStyle/>
+          <a:p>
+            <a:pPr marL="0" indent="0" algn="ctr">
+              <a:buNone/>
+            </a:pPr>
+            <a:r>
+              <a:rPr lang="en-US" sz="1650" b="1" dirty="0">
+                <a:solidFill>
+                  <a:srgbClr val="111827"/>
+                </a:solidFill>
+                <a:latin typeface="Aptos" pitchFamily="34" charset="0"/>
+                <a:ea typeface="Aptos" pitchFamily="34" charset="-122"/>
+                <a:cs typeface="Aptos" pitchFamily="34" charset="-120"/>
+              </a:rPr>
+              <a:t>SharedTag</a:t>
+            </a:r>
+            <a:endParaRPr lang="en-US" sz="1650" dirty="0"/>
+          </a:p>
+          <a:p>
+            <a:pPr marL="0" indent="0" algn="ctr">
+              <a:buNone/>
+            </a:pPr>
+            <a:r>
+              <a:rPr lang="en-US" sz="1650" b="1" dirty="0">
+                <a:solidFill>
+                  <a:srgbClr val="111827"/>
+                </a:solidFill>
+                <a:latin typeface="Aptos" pitchFamily="34" charset="0"/>
+                <a:ea typeface="Aptos" pitchFamily="34" charset="-122"/>
+                <a:cs typeface="Aptos" pitchFamily="34" charset="-120"/>
+              </a:rPr>
+              <a:t>"important"</a:t>
+            </a:r>
+            <a:endParaRPr lang="en-US" sz="1650" dirty="0"/>
+          </a:p>
+        </p:txBody>
+      </p:sp>
+      <p:sp>
+        <p:nvSpPr>
+          <p:cNvPr id="30" name="Text 26">
+            <a:extLst>
+              <a:ext uri="{FF2B5EF4-FFF2-40B4-BE49-F238E27FC236}">
+                <a16:creationId xmlns:a16="http://schemas.microsoft.com/office/drawing/2014/main" id="{F2807C6A-7568-645B-B5CE-8249B74B0C73}"/>
+              </a:ext>
+            </a:extLst>
+          </p:cNvPr>
+          <p:cNvSpPr/>
+          <p:nvPr/>
+        </p:nvSpPr>
+        <p:spPr>
+          <a:xfrm>
+            <a:off x="9622536" y="3451860"/>
+            <a:ext cx="1143000" cy="475488"/>
+          </a:xfrm>
+          <a:prstGeom prst="rect">
+            <a:avLst/>
+          </a:prstGeom>
+          <a:solidFill>
+            <a:srgbClr val="BDEEE9"/>
+          </a:solidFill>
+          <a:ln w="19050">
+            <a:solidFill>
+              <a:srgbClr val="16867E"/>
+            </a:solidFill>
+          </a:ln>
+          <a:effectLst>
+            <a:outerShdw blurRad="12700" dist="50800" dir="2700000" algn="bl" rotWithShape="0">
+              <a:srgbClr val="000000">
+                <a:alpha val="12000"/>
+              </a:srgbClr>
+            </a:outerShdw>
+          </a:effectLst>
+        </p:spPr>
+        <p:txBody>
+          <a:bodyPr wrap="square" lIns="635" tIns="635" rIns="635" bIns="635" rtlCol="0" anchor="ctr">
+            <a:normAutofit/>
+          </a:bodyPr>
+          <a:lstStyle/>
+          <a:p>
+            <a:pPr marL="0" indent="0" algn="ctr">
+              <a:buNone/>
+            </a:pPr>
+            <a:r>
+              <a:rPr lang="en-US" sz="1800" dirty="0">
+                <a:solidFill>
+                  <a:srgbClr val="111827"/>
+                </a:solidFill>
+                <a:latin typeface="Aptos" pitchFamily="34" charset="0"/>
+                <a:ea typeface="Aptos" pitchFamily="34" charset="-122"/>
+                <a:cs typeface="Aptos" pitchFamily="34" charset="-120"/>
+              </a:rPr>
+              <a:t>Helper</a:t>
+            </a:r>
+            <a:endParaRPr lang="en-US" sz="1800" dirty="0"/>
+          </a:p>
+        </p:txBody>
+      </p:sp>
+      <p:sp>
+        <p:nvSpPr>
+          <p:cNvPr id="31" name="Text 27">
+            <a:extLst>
+              <a:ext uri="{FF2B5EF4-FFF2-40B4-BE49-F238E27FC236}">
+                <a16:creationId xmlns:a16="http://schemas.microsoft.com/office/drawing/2014/main" id="{9C573193-C114-A747-200E-35715CE33E7E}"/>
+              </a:ext>
+            </a:extLst>
+          </p:cNvPr>
+          <p:cNvSpPr/>
+          <p:nvPr/>
+        </p:nvSpPr>
+        <p:spPr>
+          <a:xfrm>
+            <a:off x="731520" y="6547104"/>
+            <a:ext cx="10728655" cy="201168"/>
+          </a:xfrm>
+          <a:prstGeom prst="rect">
+            <a:avLst/>
+          </a:prstGeom>
+          <a:noFill/>
+          <a:ln/>
+        </p:spPr>
+        <p:txBody>
+          <a:bodyPr wrap="square" lIns="0" tIns="0" rIns="0" bIns="0" rtlCol="0" anchor="ctr"/>
+          <a:lstStyle/>
+          <a:p>
+            <a:pPr marL="0" indent="0" algn="ctr">
+              <a:buNone/>
+            </a:pPr>
+            <a:r>
+              <a:rPr lang="en-US" sz="1250" i="1" dirty="0">
+                <a:solidFill>
+                  <a:srgbClr val="6B7280"/>
+                </a:solidFill>
+                <a:latin typeface="Aptos" pitchFamily="34" charset="0"/>
+                <a:ea typeface="Aptos" pitchFamily="34" charset="-122"/>
+                <a:cs typeface="Aptos" pitchFamily="34" charset="-120"/>
+              </a:rPr>
+              <a:t>Java follows references from the root object during serialization.</a:t>
+            </a:r>
+            <a:endParaRPr lang="en-US" sz="1250" dirty="0"/>
+          </a:p>
+        </p:txBody>
+      </p:sp>
+    </p:spTree>
+    <p:extLst>
+      <p:ext uri="{BB962C8B-B14F-4D97-AF65-F5344CB8AC3E}">
+        <p14:creationId xmlns:p14="http://schemas.microsoft.com/office/powerpoint/2010/main" val="1438764556"/>
+      </p:ext>
+    </p:extLst>
+  </p:cSld>
+  <p:clrMapOvr>
+    <a:masterClrMapping/>
+  </p:clrMapOvr>
+</p:sld>
+</file>
+
 <file path=ppt/slides/slide3.xml><?xml version="1.0" encoding="utf-8"?>
 <p:sld xmlns:a="http://schemas.openxmlformats.org/drawingml/2006/main" xmlns:r="http://schemas.openxmlformats.org/officeDocument/2006/relationships" xmlns:p="http://schemas.openxmlformats.org/presentationml/2006/main">
   <p:cSld>

--- a/_static/images/concurrency/Presentation1.pptx
+++ b/_static/images/concurrency/Presentation1.pptx
@@ -27,6 +27,7 @@
     <p:sldId id="275" r:id="rId21"/>
     <p:sldId id="276" r:id="rId22"/>
     <p:sldId id="277" r:id="rId23"/>
+    <p:sldId id="278" r:id="rId24"/>
   </p:sldIdLst>
   <p:sldSz cx="12192000" cy="6858000"/>
   <p:notesSz cx="6858000" cy="9144000"/>
@@ -280,7 +281,7 @@
           <a:p>
             <a:fld id="{8864B806-D088-C24B-BAA0-8204A6CA2F81}" type="datetimeFigureOut">
               <a:rPr lang="en-US" smtClean="0"/>
-              <a:t>9/7/26</a:t>
+              <a:t>9/17/26</a:t>
             </a:fld>
             <a:endParaRPr lang="en-US"/>
           </a:p>
@@ -478,7 +479,7 @@
           <a:p>
             <a:fld id="{8864B806-D088-C24B-BAA0-8204A6CA2F81}" type="datetimeFigureOut">
               <a:rPr lang="en-US" smtClean="0"/>
-              <a:t>9/7/26</a:t>
+              <a:t>9/17/26</a:t>
             </a:fld>
             <a:endParaRPr lang="en-US"/>
           </a:p>
@@ -686,7 +687,7 @@
           <a:p>
             <a:fld id="{8864B806-D088-C24B-BAA0-8204A6CA2F81}" type="datetimeFigureOut">
               <a:rPr lang="en-US" smtClean="0"/>
-              <a:t>9/7/26</a:t>
+              <a:t>9/17/26</a:t>
             </a:fld>
             <a:endParaRPr lang="en-US"/>
           </a:p>
@@ -884,7 +885,7 @@
           <a:p>
             <a:fld id="{8864B806-D088-C24B-BAA0-8204A6CA2F81}" type="datetimeFigureOut">
               <a:rPr lang="en-US" smtClean="0"/>
-              <a:t>9/7/26</a:t>
+              <a:t>9/17/26</a:t>
             </a:fld>
             <a:endParaRPr lang="en-US"/>
           </a:p>
@@ -1159,7 +1160,7 @@
           <a:p>
             <a:fld id="{8864B806-D088-C24B-BAA0-8204A6CA2F81}" type="datetimeFigureOut">
               <a:rPr lang="en-US" smtClean="0"/>
-              <a:t>9/7/26</a:t>
+              <a:t>9/17/26</a:t>
             </a:fld>
             <a:endParaRPr lang="en-US"/>
           </a:p>
@@ -1424,7 +1425,7 @@
           <a:p>
             <a:fld id="{8864B806-D088-C24B-BAA0-8204A6CA2F81}" type="datetimeFigureOut">
               <a:rPr lang="en-US" smtClean="0"/>
-              <a:t>9/7/26</a:t>
+              <a:t>9/17/26</a:t>
             </a:fld>
             <a:endParaRPr lang="en-US"/>
           </a:p>
@@ -1836,7 +1837,7 @@
           <a:p>
             <a:fld id="{8864B806-D088-C24B-BAA0-8204A6CA2F81}" type="datetimeFigureOut">
               <a:rPr lang="en-US" smtClean="0"/>
-              <a:t>9/7/26</a:t>
+              <a:t>9/17/26</a:t>
             </a:fld>
             <a:endParaRPr lang="en-US"/>
           </a:p>
@@ -1977,7 +1978,7 @@
           <a:p>
             <a:fld id="{8864B806-D088-C24B-BAA0-8204A6CA2F81}" type="datetimeFigureOut">
               <a:rPr lang="en-US" smtClean="0"/>
-              <a:t>9/7/26</a:t>
+              <a:t>9/17/26</a:t>
             </a:fld>
             <a:endParaRPr lang="en-US"/>
           </a:p>
@@ -2090,7 +2091,7 @@
           <a:p>
             <a:fld id="{8864B806-D088-C24B-BAA0-8204A6CA2F81}" type="datetimeFigureOut">
               <a:rPr lang="en-US" smtClean="0"/>
-              <a:t>9/7/26</a:t>
+              <a:t>9/17/26</a:t>
             </a:fld>
             <a:endParaRPr lang="en-US"/>
           </a:p>
@@ -2401,7 +2402,7 @@
           <a:p>
             <a:fld id="{8864B806-D088-C24B-BAA0-8204A6CA2F81}" type="datetimeFigureOut">
               <a:rPr lang="en-US" smtClean="0"/>
-              <a:t>9/7/26</a:t>
+              <a:t>9/17/26</a:t>
             </a:fld>
             <a:endParaRPr lang="en-US"/>
           </a:p>
@@ -2689,7 +2690,7 @@
           <a:p>
             <a:fld id="{8864B806-D088-C24B-BAA0-8204A6CA2F81}" type="datetimeFigureOut">
               <a:rPr lang="en-US" smtClean="0"/>
-              <a:t>9/7/26</a:t>
+              <a:t>9/17/26</a:t>
             </a:fld>
             <a:endParaRPr lang="en-US"/>
           </a:p>
@@ -2930,7 +2931,7 @@
           <a:p>
             <a:fld id="{8864B806-D088-C24B-BAA0-8204A6CA2F81}" type="datetimeFigureOut">
               <a:rPr lang="en-US" smtClean="0"/>
-              <a:t>9/7/26</a:t>
+              <a:t>9/17/26</a:t>
             </a:fld>
             <a:endParaRPr lang="en-US"/>
           </a:p>
@@ -20111,6 +20112,1243 @@
 </p:sld>
 </file>
 
+<file path=ppt/slides/slide23.xml><?xml version="1.0" encoding="utf-8"?>
+<p:sld xmlns:a="http://schemas.openxmlformats.org/drawingml/2006/main" xmlns:r="http://schemas.openxmlformats.org/officeDocument/2006/relationships" xmlns:p="http://schemas.openxmlformats.org/presentationml/2006/main">
+  <p:cSld>
+    <p:spTree>
+      <p:nvGrpSpPr>
+        <p:cNvPr id="1" name=""/>
+        <p:cNvGrpSpPr/>
+        <p:nvPr/>
+      </p:nvGrpSpPr>
+      <p:grpSpPr>
+        <a:xfrm>
+          <a:off x="0" y="0"/>
+          <a:ext cx="0" cy="0"/>
+          <a:chOff x="0" y="0"/>
+          <a:chExt cx="0" cy="0"/>
+        </a:xfrm>
+      </p:grpSpPr>
+      <p:sp>
+        <p:nvSpPr>
+          <p:cNvPr id="4" name="Shape 2">
+            <a:extLst>
+              <a:ext uri="{FF2B5EF4-FFF2-40B4-BE49-F238E27FC236}">
+                <a16:creationId xmlns:a16="http://schemas.microsoft.com/office/drawing/2014/main" id="{321D7475-956F-DDAD-F769-13BB6393850E}"/>
+              </a:ext>
+            </a:extLst>
+          </p:cNvPr>
+          <p:cNvSpPr/>
+          <p:nvPr/>
+        </p:nvSpPr>
+        <p:spPr>
+          <a:xfrm>
+            <a:off x="1188720" y="2212848"/>
+            <a:ext cx="1005840" cy="0"/>
+          </a:xfrm>
+          <a:prstGeom prst="line">
+            <a:avLst/>
+          </a:prstGeom>
+          <a:noFill/>
+          <a:ln w="20320">
+            <a:solidFill>
+              <a:srgbClr val="334155"/>
+            </a:solidFill>
+            <a:prstDash val="solid"/>
+            <a:headEnd type="none"/>
+            <a:tailEnd type="triangle"/>
+          </a:ln>
+        </p:spPr>
+        <p:txBody>
+          <a:bodyPr/>
+          <a:lstStyle/>
+          <a:p>
+            <a:endParaRPr lang="en-US"/>
+          </a:p>
+        </p:txBody>
+      </p:sp>
+      <p:sp>
+        <p:nvSpPr>
+          <p:cNvPr id="5" name="Text 3">
+            <a:extLst>
+              <a:ext uri="{FF2B5EF4-FFF2-40B4-BE49-F238E27FC236}">
+                <a16:creationId xmlns:a16="http://schemas.microsoft.com/office/drawing/2014/main" id="{D3776647-ABC8-7152-AA8D-D88A4C0206F1}"/>
+              </a:ext>
+            </a:extLst>
+          </p:cNvPr>
+          <p:cNvSpPr/>
+          <p:nvPr/>
+        </p:nvSpPr>
+        <p:spPr>
+          <a:xfrm>
+            <a:off x="1225296" y="1938528"/>
+            <a:ext cx="896112" cy="201168"/>
+          </a:xfrm>
+          <a:prstGeom prst="rect">
+            <a:avLst/>
+          </a:prstGeom>
+          <a:noFill/>
+          <a:ln/>
+        </p:spPr>
+        <p:txBody>
+          <a:bodyPr wrap="square" lIns="0" tIns="0" rIns="0" bIns="0" rtlCol="0" anchor="ctr">
+            <a:noAutofit/>
+          </a:bodyPr>
+          <a:lstStyle/>
+          <a:p>
+            <a:pPr marL="0" indent="0" algn="ctr">
+              <a:buNone/>
+            </a:pPr>
+            <a:r>
+              <a:rPr lang="en-US" sz="1200" dirty="0">
+                <a:solidFill>
+                  <a:srgbClr val="1F2937"/>
+                </a:solidFill>
+                <a:latin typeface="Aptos" pitchFamily="34" charset="0"/>
+                <a:ea typeface="Aptos" pitchFamily="34" charset="-122"/>
+                <a:cs typeface="Aptos" pitchFamily="34" charset="-120"/>
+              </a:rPr>
+              <a:t>click / type / drag</a:t>
+            </a:r>
+            <a:endParaRPr lang="en-US" sz="1200" dirty="0"/>
+          </a:p>
+        </p:txBody>
+      </p:sp>
+      <p:sp>
+        <p:nvSpPr>
+          <p:cNvPr id="6" name="Shape 4">
+            <a:extLst>
+              <a:ext uri="{FF2B5EF4-FFF2-40B4-BE49-F238E27FC236}">
+                <a16:creationId xmlns:a16="http://schemas.microsoft.com/office/drawing/2014/main" id="{F22D925A-1E13-D7A1-3B00-B41DAF1F1598}"/>
+              </a:ext>
+            </a:extLst>
+          </p:cNvPr>
+          <p:cNvSpPr/>
+          <p:nvPr/>
+        </p:nvSpPr>
+        <p:spPr>
+          <a:xfrm>
+            <a:off x="1188720" y="2633472"/>
+            <a:ext cx="1005840" cy="0"/>
+          </a:xfrm>
+          <a:prstGeom prst="line">
+            <a:avLst/>
+          </a:prstGeom>
+          <a:noFill/>
+          <a:ln w="20320">
+            <a:solidFill>
+              <a:srgbClr val="334155"/>
+            </a:solidFill>
+            <a:prstDash val="solid"/>
+            <a:headEnd type="triangle"/>
+            <a:tailEnd type="none"/>
+          </a:ln>
+        </p:spPr>
+        <p:txBody>
+          <a:bodyPr/>
+          <a:lstStyle/>
+          <a:p>
+            <a:endParaRPr lang="en-US"/>
+          </a:p>
+        </p:txBody>
+      </p:sp>
+      <p:sp>
+        <p:nvSpPr>
+          <p:cNvPr id="7" name="Text 5">
+            <a:extLst>
+              <a:ext uri="{FF2B5EF4-FFF2-40B4-BE49-F238E27FC236}">
+                <a16:creationId xmlns:a16="http://schemas.microsoft.com/office/drawing/2014/main" id="{330D1DDD-D053-44A1-B099-CCE3CE396017}"/>
+              </a:ext>
+            </a:extLst>
+          </p:cNvPr>
+          <p:cNvSpPr/>
+          <p:nvPr/>
+        </p:nvSpPr>
+        <p:spPr>
+          <a:xfrm>
+            <a:off x="1225296" y="2761488"/>
+            <a:ext cx="896112" cy="201168"/>
+          </a:xfrm>
+          <a:prstGeom prst="rect">
+            <a:avLst/>
+          </a:prstGeom>
+          <a:noFill/>
+          <a:ln/>
+        </p:spPr>
+        <p:txBody>
+          <a:bodyPr wrap="square" lIns="0" tIns="0" rIns="0" bIns="0" rtlCol="0" anchor="ctr">
+            <a:noAutofit/>
+          </a:bodyPr>
+          <a:lstStyle/>
+          <a:p>
+            <a:pPr marL="0" indent="0" algn="ctr">
+              <a:buNone/>
+            </a:pPr>
+            <a:r>
+              <a:rPr lang="en-US" sz="1200" dirty="0">
+                <a:solidFill>
+                  <a:srgbClr val="1F2937"/>
+                </a:solidFill>
+                <a:latin typeface="Aptos" pitchFamily="34" charset="0"/>
+                <a:ea typeface="Aptos" pitchFamily="34" charset="-122"/>
+                <a:cs typeface="Aptos" pitchFamily="34" charset="-120"/>
+              </a:rPr>
+              <a:t>updated display</a:t>
+            </a:r>
+            <a:endParaRPr lang="en-US" sz="1200" dirty="0"/>
+          </a:p>
+        </p:txBody>
+      </p:sp>
+      <p:sp>
+        <p:nvSpPr>
+          <p:cNvPr id="8" name="Shape 6">
+            <a:extLst>
+              <a:ext uri="{FF2B5EF4-FFF2-40B4-BE49-F238E27FC236}">
+                <a16:creationId xmlns:a16="http://schemas.microsoft.com/office/drawing/2014/main" id="{E5344F70-0DA0-C460-5230-D3778BDAD6CB}"/>
+              </a:ext>
+            </a:extLst>
+          </p:cNvPr>
+          <p:cNvSpPr/>
+          <p:nvPr/>
+        </p:nvSpPr>
+        <p:spPr>
+          <a:xfrm>
+            <a:off x="4343400" y="2286000"/>
+            <a:ext cx="731520" cy="0"/>
+          </a:xfrm>
+          <a:prstGeom prst="line">
+            <a:avLst/>
+          </a:prstGeom>
+          <a:noFill/>
+          <a:ln w="20320">
+            <a:solidFill>
+              <a:srgbClr val="334155"/>
+            </a:solidFill>
+            <a:prstDash val="solid"/>
+            <a:headEnd type="none"/>
+            <a:tailEnd type="triangle"/>
+          </a:ln>
+        </p:spPr>
+        <p:txBody>
+          <a:bodyPr/>
+          <a:lstStyle/>
+          <a:p>
+            <a:endParaRPr lang="en-US"/>
+          </a:p>
+        </p:txBody>
+      </p:sp>
+      <p:sp>
+        <p:nvSpPr>
+          <p:cNvPr id="9" name="Text 7">
+            <a:extLst>
+              <a:ext uri="{FF2B5EF4-FFF2-40B4-BE49-F238E27FC236}">
+                <a16:creationId xmlns:a16="http://schemas.microsoft.com/office/drawing/2014/main" id="{93CF9B3B-064B-CBDD-348A-E66ECEC8A083}"/>
+              </a:ext>
+            </a:extLst>
+          </p:cNvPr>
+          <p:cNvSpPr/>
+          <p:nvPr/>
+        </p:nvSpPr>
+        <p:spPr>
+          <a:xfrm>
+            <a:off x="4462272" y="2002536"/>
+            <a:ext cx="475488" cy="219456"/>
+          </a:xfrm>
+          <a:prstGeom prst="rect">
+            <a:avLst/>
+          </a:prstGeom>
+          <a:noFill/>
+          <a:ln/>
+        </p:spPr>
+        <p:txBody>
+          <a:bodyPr wrap="square" lIns="0" tIns="0" rIns="0" bIns="0" rtlCol="0" anchor="ctr">
+            <a:normAutofit/>
+          </a:bodyPr>
+          <a:lstStyle/>
+          <a:p>
+            <a:pPr marL="0" indent="0" algn="ctr">
+              <a:buNone/>
+            </a:pPr>
+            <a:r>
+              <a:rPr lang="en-US" sz="1200" dirty="0">
+                <a:solidFill>
+                  <a:srgbClr val="1F2937"/>
+                </a:solidFill>
+                <a:latin typeface="Aptos" pitchFamily="34" charset="0"/>
+                <a:ea typeface="Aptos" pitchFamily="34" charset="-122"/>
+                <a:cs typeface="Aptos" pitchFamily="34" charset="-120"/>
+              </a:rPr>
+              <a:t>event</a:t>
+            </a:r>
+            <a:endParaRPr lang="en-US" sz="1200" dirty="0"/>
+          </a:p>
+        </p:txBody>
+      </p:sp>
+      <p:sp>
+        <p:nvSpPr>
+          <p:cNvPr id="10" name="Shape 8">
+            <a:extLst>
+              <a:ext uri="{FF2B5EF4-FFF2-40B4-BE49-F238E27FC236}">
+                <a16:creationId xmlns:a16="http://schemas.microsoft.com/office/drawing/2014/main" id="{67C369EE-77A1-7DA9-5A0C-0049B14F4216}"/>
+              </a:ext>
+            </a:extLst>
+          </p:cNvPr>
+          <p:cNvSpPr/>
+          <p:nvPr/>
+        </p:nvSpPr>
+        <p:spPr>
+          <a:xfrm>
+            <a:off x="7223760" y="2286000"/>
+            <a:ext cx="731520" cy="0"/>
+          </a:xfrm>
+          <a:prstGeom prst="line">
+            <a:avLst/>
+          </a:prstGeom>
+          <a:noFill/>
+          <a:ln w="20320">
+            <a:solidFill>
+              <a:srgbClr val="334155"/>
+            </a:solidFill>
+            <a:prstDash val="solid"/>
+            <a:headEnd type="none"/>
+            <a:tailEnd type="triangle"/>
+          </a:ln>
+        </p:spPr>
+        <p:txBody>
+          <a:bodyPr/>
+          <a:lstStyle/>
+          <a:p>
+            <a:endParaRPr lang="en-US"/>
+          </a:p>
+        </p:txBody>
+      </p:sp>
+      <p:sp>
+        <p:nvSpPr>
+          <p:cNvPr id="11" name="Text 9">
+            <a:extLst>
+              <a:ext uri="{FF2B5EF4-FFF2-40B4-BE49-F238E27FC236}">
+                <a16:creationId xmlns:a16="http://schemas.microsoft.com/office/drawing/2014/main" id="{93C4A781-53BB-B016-91C8-BEC534EA5806}"/>
+              </a:ext>
+            </a:extLst>
+          </p:cNvPr>
+          <p:cNvSpPr/>
+          <p:nvPr/>
+        </p:nvSpPr>
+        <p:spPr>
+          <a:xfrm>
+            <a:off x="7223459" y="1874520"/>
+            <a:ext cx="758952" cy="411480"/>
+          </a:xfrm>
+          <a:prstGeom prst="rect">
+            <a:avLst/>
+          </a:prstGeom>
+          <a:noFill/>
+          <a:ln/>
+        </p:spPr>
+        <p:txBody>
+          <a:bodyPr wrap="square" lIns="0" tIns="0" rIns="0" bIns="0" rtlCol="0" anchor="ctr">
+            <a:normAutofit/>
+          </a:bodyPr>
+          <a:lstStyle/>
+          <a:p>
+            <a:pPr marL="0" indent="0" algn="ctr">
+              <a:buNone/>
+            </a:pPr>
+            <a:r>
+              <a:rPr lang="en-US" sz="1200" dirty="0">
+                <a:solidFill>
+                  <a:srgbClr val="1F2937"/>
+                </a:solidFill>
+                <a:latin typeface="Aptos" pitchFamily="34" charset="0"/>
+                <a:ea typeface="Aptos" pitchFamily="34" charset="-122"/>
+                <a:cs typeface="Aptos" pitchFamily="34" charset="-120"/>
+              </a:rPr>
+              <a:t>update /</a:t>
+            </a:r>
+            <a:endParaRPr lang="en-US" sz="1200" dirty="0"/>
+          </a:p>
+          <a:p>
+            <a:pPr marL="0" indent="0" algn="ctr">
+              <a:buNone/>
+            </a:pPr>
+            <a:r>
+              <a:rPr lang="en-US" sz="1200" dirty="0">
+                <a:solidFill>
+                  <a:srgbClr val="1F2937"/>
+                </a:solidFill>
+                <a:latin typeface="Aptos" pitchFamily="34" charset="0"/>
+                <a:ea typeface="Aptos" pitchFamily="34" charset="-122"/>
+                <a:cs typeface="Aptos" pitchFamily="34" charset="-120"/>
+              </a:rPr>
+              <a:t>command</a:t>
+            </a:r>
+            <a:endParaRPr lang="en-US" sz="1200" dirty="0"/>
+          </a:p>
+        </p:txBody>
+      </p:sp>
+      <p:sp>
+        <p:nvSpPr>
+          <p:cNvPr id="12" name="Shape 10">
+            <a:extLst>
+              <a:ext uri="{FF2B5EF4-FFF2-40B4-BE49-F238E27FC236}">
+                <a16:creationId xmlns:a16="http://schemas.microsoft.com/office/drawing/2014/main" id="{0B7875B0-DF83-5E7D-9130-7B8FBCC4C68B}"/>
+              </a:ext>
+            </a:extLst>
+          </p:cNvPr>
+          <p:cNvSpPr/>
+          <p:nvPr/>
+        </p:nvSpPr>
+        <p:spPr>
+          <a:xfrm>
+            <a:off x="9189720" y="3447288"/>
+            <a:ext cx="0" cy="676656"/>
+          </a:xfrm>
+          <a:prstGeom prst="line">
+            <a:avLst/>
+          </a:prstGeom>
+          <a:noFill/>
+          <a:ln w="20320">
+            <a:solidFill>
+              <a:srgbClr val="334155"/>
+            </a:solidFill>
+            <a:prstDash val="solid"/>
+            <a:headEnd type="none"/>
+            <a:tailEnd type="none"/>
+          </a:ln>
+        </p:spPr>
+        <p:txBody>
+          <a:bodyPr/>
+          <a:lstStyle/>
+          <a:p>
+            <a:endParaRPr lang="en-US"/>
+          </a:p>
+        </p:txBody>
+      </p:sp>
+      <p:sp>
+        <p:nvSpPr>
+          <p:cNvPr id="13" name="Shape 11">
+            <a:extLst>
+              <a:ext uri="{FF2B5EF4-FFF2-40B4-BE49-F238E27FC236}">
+                <a16:creationId xmlns:a16="http://schemas.microsoft.com/office/drawing/2014/main" id="{A46B1F7F-B067-EF2D-B899-F4DAEFA1737A}"/>
+              </a:ext>
+            </a:extLst>
+          </p:cNvPr>
+          <p:cNvSpPr/>
+          <p:nvPr/>
+        </p:nvSpPr>
+        <p:spPr>
+          <a:xfrm>
+            <a:off x="3268980" y="4123944"/>
+            <a:ext cx="5920740" cy="0"/>
+          </a:xfrm>
+          <a:prstGeom prst="line">
+            <a:avLst/>
+          </a:prstGeom>
+          <a:noFill/>
+          <a:ln w="20320">
+            <a:solidFill>
+              <a:srgbClr val="334155"/>
+            </a:solidFill>
+            <a:prstDash val="solid"/>
+            <a:headEnd type="none"/>
+            <a:tailEnd type="none"/>
+          </a:ln>
+        </p:spPr>
+        <p:txBody>
+          <a:bodyPr/>
+          <a:lstStyle/>
+          <a:p>
+            <a:endParaRPr lang="en-US"/>
+          </a:p>
+        </p:txBody>
+      </p:sp>
+      <p:sp>
+        <p:nvSpPr>
+          <p:cNvPr id="14" name="Shape 12">
+            <a:extLst>
+              <a:ext uri="{FF2B5EF4-FFF2-40B4-BE49-F238E27FC236}">
+                <a16:creationId xmlns:a16="http://schemas.microsoft.com/office/drawing/2014/main" id="{4F8E6AAC-19D5-4D8E-1CB5-3ADE8EF4F94A}"/>
+              </a:ext>
+            </a:extLst>
+          </p:cNvPr>
+          <p:cNvSpPr/>
+          <p:nvPr/>
+        </p:nvSpPr>
+        <p:spPr>
+          <a:xfrm>
+            <a:off x="3268980" y="3447288"/>
+            <a:ext cx="0" cy="676656"/>
+          </a:xfrm>
+          <a:prstGeom prst="line">
+            <a:avLst/>
+          </a:prstGeom>
+          <a:noFill/>
+          <a:ln w="20320">
+            <a:solidFill>
+              <a:srgbClr val="334155"/>
+            </a:solidFill>
+            <a:prstDash val="solid"/>
+            <a:headEnd type="triangle"/>
+            <a:tailEnd type="none"/>
+          </a:ln>
+        </p:spPr>
+        <p:txBody>
+          <a:bodyPr/>
+          <a:lstStyle/>
+          <a:p>
+            <a:endParaRPr lang="en-US"/>
+          </a:p>
+        </p:txBody>
+      </p:sp>
+      <p:sp>
+        <p:nvSpPr>
+          <p:cNvPr id="15" name="Text 13">
+            <a:extLst>
+              <a:ext uri="{FF2B5EF4-FFF2-40B4-BE49-F238E27FC236}">
+                <a16:creationId xmlns:a16="http://schemas.microsoft.com/office/drawing/2014/main" id="{688CA6F2-81E2-43CA-C7FE-889B12DC746E}"/>
+              </a:ext>
+            </a:extLst>
+          </p:cNvPr>
+          <p:cNvSpPr/>
+          <p:nvPr/>
+        </p:nvSpPr>
+        <p:spPr>
+          <a:xfrm>
+            <a:off x="4983480" y="3858768"/>
+            <a:ext cx="1965960" cy="228600"/>
+          </a:xfrm>
+          <a:prstGeom prst="rect">
+            <a:avLst/>
+          </a:prstGeom>
+          <a:noFill/>
+          <a:ln/>
+        </p:spPr>
+        <p:txBody>
+          <a:bodyPr wrap="square" lIns="0" tIns="0" rIns="0" bIns="0" rtlCol="0" anchor="ctr">
+            <a:normAutofit/>
+          </a:bodyPr>
+          <a:lstStyle/>
+          <a:p>
+            <a:pPr marL="0" indent="0" algn="ctr">
+              <a:buNone/>
+            </a:pPr>
+            <a:r>
+              <a:rPr lang="en-US" sz="1200" dirty="0">
+                <a:solidFill>
+                  <a:srgbClr val="1F2937"/>
+                </a:solidFill>
+                <a:latin typeface="Aptos" pitchFamily="34" charset="0"/>
+                <a:ea typeface="Aptos" pitchFamily="34" charset="-122"/>
+                <a:cs typeface="Aptos" pitchFamily="34" charset="-120"/>
+              </a:rPr>
+              <a:t>state change / refresh</a:t>
+            </a:r>
+            <a:endParaRPr lang="en-US" sz="1200" dirty="0"/>
+          </a:p>
+        </p:txBody>
+      </p:sp>
+      <p:sp>
+        <p:nvSpPr>
+          <p:cNvPr id="16" name="Shape 14">
+            <a:extLst>
+              <a:ext uri="{FF2B5EF4-FFF2-40B4-BE49-F238E27FC236}">
+                <a16:creationId xmlns:a16="http://schemas.microsoft.com/office/drawing/2014/main" id="{866B3088-A46E-A51F-E1A9-43F98C77F3B3}"/>
+              </a:ext>
+            </a:extLst>
+          </p:cNvPr>
+          <p:cNvSpPr/>
+          <p:nvPr/>
+        </p:nvSpPr>
+        <p:spPr>
+          <a:xfrm>
+            <a:off x="411480" y="1993392"/>
+            <a:ext cx="777240" cy="1005840"/>
+          </a:xfrm>
+          <a:prstGeom prst="roundRect">
+            <a:avLst>
+              <a:gd name="adj" fmla="val 7059"/>
+            </a:avLst>
+          </a:prstGeom>
+          <a:solidFill>
+            <a:srgbClr val="FFFFFF"/>
+          </a:solidFill>
+          <a:ln w="15240">
+            <a:solidFill>
+              <a:srgbClr val="CBD5E1"/>
+            </a:solidFill>
+            <a:prstDash val="solid"/>
+          </a:ln>
+          <a:effectLst>
+            <a:outerShdw blurRad="12700" dist="50800" dir="2700000" algn="bl" rotWithShape="0">
+              <a:srgbClr val="CBD5E1">
+                <a:alpha val="22000"/>
+              </a:srgbClr>
+            </a:outerShdw>
+          </a:effectLst>
+        </p:spPr>
+        <p:txBody>
+          <a:bodyPr/>
+          <a:lstStyle/>
+          <a:p>
+            <a:endParaRPr lang="en-US"/>
+          </a:p>
+        </p:txBody>
+      </p:sp>
+      <p:sp>
+        <p:nvSpPr>
+          <p:cNvPr id="17" name="Shape 15">
+            <a:extLst>
+              <a:ext uri="{FF2B5EF4-FFF2-40B4-BE49-F238E27FC236}">
+                <a16:creationId xmlns:a16="http://schemas.microsoft.com/office/drawing/2014/main" id="{1D53EAF9-86ED-951B-8FE4-25AD9F28FDAB}"/>
+              </a:ext>
+            </a:extLst>
+          </p:cNvPr>
+          <p:cNvSpPr/>
+          <p:nvPr/>
+        </p:nvSpPr>
+        <p:spPr>
+          <a:xfrm>
+            <a:off x="694944" y="2157984"/>
+            <a:ext cx="201168" cy="201168"/>
+          </a:xfrm>
+          <a:prstGeom prst="ellipse">
+            <a:avLst/>
+          </a:prstGeom>
+          <a:solidFill>
+            <a:srgbClr val="60A5FA"/>
+          </a:solidFill>
+          <a:ln w="12700">
+            <a:solidFill>
+              <a:srgbClr val="60A5FA"/>
+            </a:solidFill>
+            <a:prstDash val="solid"/>
+          </a:ln>
+        </p:spPr>
+        <p:txBody>
+          <a:bodyPr/>
+          <a:lstStyle/>
+          <a:p>
+            <a:endParaRPr lang="en-US"/>
+          </a:p>
+        </p:txBody>
+      </p:sp>
+      <p:sp>
+        <p:nvSpPr>
+          <p:cNvPr id="18" name="Shape 16">
+            <a:extLst>
+              <a:ext uri="{FF2B5EF4-FFF2-40B4-BE49-F238E27FC236}">
+                <a16:creationId xmlns:a16="http://schemas.microsoft.com/office/drawing/2014/main" id="{16AD3AF6-24F8-A524-9723-930EFD5DD700}"/>
+              </a:ext>
+            </a:extLst>
+          </p:cNvPr>
+          <p:cNvSpPr/>
+          <p:nvPr/>
+        </p:nvSpPr>
+        <p:spPr>
+          <a:xfrm>
+            <a:off x="612648" y="2404872"/>
+            <a:ext cx="374904" cy="246888"/>
+          </a:xfrm>
+          <a:prstGeom prst="roundRect">
+            <a:avLst>
+              <a:gd name="adj" fmla="val 29630"/>
+            </a:avLst>
+          </a:prstGeom>
+          <a:solidFill>
+            <a:srgbClr val="60A5FA"/>
+          </a:solidFill>
+          <a:ln w="12700">
+            <a:solidFill>
+              <a:srgbClr val="60A5FA"/>
+            </a:solidFill>
+            <a:prstDash val="solid"/>
+          </a:ln>
+        </p:spPr>
+        <p:txBody>
+          <a:bodyPr/>
+          <a:lstStyle/>
+          <a:p>
+            <a:endParaRPr lang="en-US"/>
+          </a:p>
+        </p:txBody>
+      </p:sp>
+      <p:sp>
+        <p:nvSpPr>
+          <p:cNvPr id="19" name="Text 17">
+            <a:extLst>
+              <a:ext uri="{FF2B5EF4-FFF2-40B4-BE49-F238E27FC236}">
+                <a16:creationId xmlns:a16="http://schemas.microsoft.com/office/drawing/2014/main" id="{19B70DE4-AC4F-FF47-23EE-E5D851ECCA20}"/>
+              </a:ext>
+            </a:extLst>
+          </p:cNvPr>
+          <p:cNvSpPr/>
+          <p:nvPr/>
+        </p:nvSpPr>
+        <p:spPr>
+          <a:xfrm>
+            <a:off x="448056" y="2706624"/>
+            <a:ext cx="704088" cy="164592"/>
+          </a:xfrm>
+          <a:prstGeom prst="rect">
+            <a:avLst/>
+          </a:prstGeom>
+          <a:noFill/>
+          <a:ln/>
+        </p:spPr>
+        <p:txBody>
+          <a:bodyPr wrap="square" lIns="0" tIns="0" rIns="0" bIns="0" rtlCol="0" anchor="ctr"/>
+          <a:lstStyle/>
+          <a:p>
+            <a:pPr marL="0" indent="0" algn="ctr">
+              <a:buNone/>
+            </a:pPr>
+            <a:r>
+              <a:rPr lang="en-US" sz="1100" b="1" dirty="0">
+                <a:solidFill>
+                  <a:srgbClr val="14213D"/>
+                </a:solidFill>
+                <a:latin typeface="Aptos" pitchFamily="34" charset="0"/>
+                <a:ea typeface="Aptos" pitchFamily="34" charset="-122"/>
+                <a:cs typeface="Aptos" pitchFamily="34" charset="-120"/>
+              </a:rPr>
+              <a:t>User</a:t>
+            </a:r>
+            <a:endParaRPr lang="en-US" sz="1100" dirty="0"/>
+          </a:p>
+        </p:txBody>
+      </p:sp>
+      <p:sp>
+        <p:nvSpPr>
+          <p:cNvPr id="20" name="Shape 18">
+            <a:extLst>
+              <a:ext uri="{FF2B5EF4-FFF2-40B4-BE49-F238E27FC236}">
+                <a16:creationId xmlns:a16="http://schemas.microsoft.com/office/drawing/2014/main" id="{ED6B9231-F6FA-ADF8-C6C3-886E0B65DC0F}"/>
+              </a:ext>
+            </a:extLst>
+          </p:cNvPr>
+          <p:cNvSpPr/>
+          <p:nvPr/>
+        </p:nvSpPr>
+        <p:spPr>
+          <a:xfrm>
+            <a:off x="2194560" y="1481328"/>
+            <a:ext cx="2148840" cy="1965960"/>
+          </a:xfrm>
+          <a:prstGeom prst="roundRect">
+            <a:avLst>
+              <a:gd name="adj" fmla="val 3721"/>
+            </a:avLst>
+          </a:prstGeom>
+          <a:solidFill>
+            <a:srgbClr val="DBEAFE"/>
+          </a:solidFill>
+          <a:ln w="19050">
+            <a:solidFill>
+              <a:srgbClr val="2563EB"/>
+            </a:solidFill>
+            <a:prstDash val="solid"/>
+          </a:ln>
+          <a:effectLst>
+            <a:outerShdw blurRad="12700" dist="50800" dir="2700000" algn="bl" rotWithShape="0">
+              <a:srgbClr val="CBD5E1">
+                <a:alpha val="25000"/>
+              </a:srgbClr>
+            </a:outerShdw>
+          </a:effectLst>
+        </p:spPr>
+        <p:txBody>
+          <a:bodyPr/>
+          <a:lstStyle/>
+          <a:p>
+            <a:endParaRPr lang="en-US"/>
+          </a:p>
+        </p:txBody>
+      </p:sp>
+      <p:sp>
+        <p:nvSpPr>
+          <p:cNvPr id="21" name="Text 19">
+            <a:extLst>
+              <a:ext uri="{FF2B5EF4-FFF2-40B4-BE49-F238E27FC236}">
+                <a16:creationId xmlns:a16="http://schemas.microsoft.com/office/drawing/2014/main" id="{AD900B5D-F467-CF34-14C1-C99E3EDAB816}"/>
+              </a:ext>
+            </a:extLst>
+          </p:cNvPr>
+          <p:cNvSpPr/>
+          <p:nvPr/>
+        </p:nvSpPr>
+        <p:spPr>
+          <a:xfrm>
+            <a:off x="2331720" y="1645920"/>
+            <a:ext cx="1874520" cy="320040"/>
+          </a:xfrm>
+          <a:prstGeom prst="rect">
+            <a:avLst/>
+          </a:prstGeom>
+          <a:noFill/>
+          <a:ln/>
+        </p:spPr>
+        <p:txBody>
+          <a:bodyPr wrap="square" lIns="0" tIns="0" rIns="0" bIns="0" rtlCol="0" anchor="ctr"/>
+          <a:lstStyle/>
+          <a:p>
+            <a:pPr marL="0" indent="0" algn="ctr">
+              <a:buNone/>
+            </a:pPr>
+            <a:r>
+              <a:rPr lang="en-US" sz="2100" b="1" dirty="0">
+                <a:solidFill>
+                  <a:srgbClr val="14213D"/>
+                </a:solidFill>
+                <a:latin typeface="Aptos Display" pitchFamily="34" charset="0"/>
+                <a:ea typeface="Aptos Display" pitchFamily="34" charset="-122"/>
+                <a:cs typeface="Aptos Display" pitchFamily="34" charset="-120"/>
+              </a:rPr>
+              <a:t>View</a:t>
+            </a:r>
+            <a:endParaRPr lang="en-US" sz="2100" dirty="0"/>
+          </a:p>
+        </p:txBody>
+      </p:sp>
+      <p:sp>
+        <p:nvSpPr>
+          <p:cNvPr id="22" name="Text 20">
+            <a:extLst>
+              <a:ext uri="{FF2B5EF4-FFF2-40B4-BE49-F238E27FC236}">
+                <a16:creationId xmlns:a16="http://schemas.microsoft.com/office/drawing/2014/main" id="{8787893C-ABFB-A25D-41B5-9F9B1951B028}"/>
+              </a:ext>
+            </a:extLst>
+          </p:cNvPr>
+          <p:cNvSpPr/>
+          <p:nvPr/>
+        </p:nvSpPr>
+        <p:spPr>
+          <a:xfrm>
+            <a:off x="2423159" y="2194560"/>
+            <a:ext cx="1929083" cy="1124712"/>
+          </a:xfrm>
+          <a:prstGeom prst="rect">
+            <a:avLst/>
+          </a:prstGeom>
+          <a:noFill/>
+          <a:ln/>
+        </p:spPr>
+        <p:txBody>
+          <a:bodyPr wrap="square" lIns="254" tIns="254" rIns="254" bIns="254" rtlCol="0" anchor="ctr">
+            <a:noAutofit/>
+          </a:bodyPr>
+          <a:lstStyle/>
+          <a:p>
+            <a:pPr marL="0" indent="0">
+              <a:buNone/>
+            </a:pPr>
+            <a:r>
+              <a:rPr lang="en-US" sz="1500" dirty="0">
+                <a:solidFill>
+                  <a:srgbClr val="1F2937"/>
+                </a:solidFill>
+                <a:latin typeface="Aptos" pitchFamily="34" charset="0"/>
+                <a:ea typeface="Aptos" pitchFamily="34" charset="-122"/>
+                <a:cs typeface="Aptos" pitchFamily="34" charset="-120"/>
+              </a:rPr>
+              <a:t>• Displays the UI</a:t>
+            </a:r>
+            <a:endParaRPr lang="en-US" sz="1500" dirty="0"/>
+          </a:p>
+          <a:p>
+            <a:pPr marL="0" indent="0">
+              <a:buNone/>
+            </a:pPr>
+            <a:r>
+              <a:rPr lang="en-US" sz="1500" dirty="0">
+                <a:solidFill>
+                  <a:srgbClr val="1F2937"/>
+                </a:solidFill>
+                <a:latin typeface="Aptos" pitchFamily="34" charset="0"/>
+                <a:ea typeface="Aptos" pitchFamily="34" charset="-122"/>
+                <a:cs typeface="Aptos" pitchFamily="34" charset="-120"/>
+              </a:rPr>
+              <a:t>• Shows current state</a:t>
+            </a:r>
+            <a:endParaRPr lang="en-US" sz="1500" dirty="0"/>
+          </a:p>
+          <a:p>
+            <a:pPr marL="0" indent="0">
+              <a:buNone/>
+            </a:pPr>
+            <a:r>
+              <a:rPr lang="en-US" sz="1500" dirty="0">
+                <a:solidFill>
+                  <a:srgbClr val="1F2937"/>
+                </a:solidFill>
+                <a:latin typeface="Aptos" pitchFamily="34" charset="0"/>
+                <a:ea typeface="Aptos" pitchFamily="34" charset="-122"/>
+                <a:cs typeface="Aptos" pitchFamily="34" charset="-120"/>
+              </a:rPr>
+              <a:t>• Captures user gestures</a:t>
+            </a:r>
+            <a:endParaRPr lang="en-US" sz="1500" dirty="0"/>
+          </a:p>
+        </p:txBody>
+      </p:sp>
+      <p:sp>
+        <p:nvSpPr>
+          <p:cNvPr id="23" name="Shape 21">
+            <a:extLst>
+              <a:ext uri="{FF2B5EF4-FFF2-40B4-BE49-F238E27FC236}">
+                <a16:creationId xmlns:a16="http://schemas.microsoft.com/office/drawing/2014/main" id="{72668ACA-43CD-70C4-CE82-A0B5C6E0B1B4}"/>
+              </a:ext>
+            </a:extLst>
+          </p:cNvPr>
+          <p:cNvSpPr/>
+          <p:nvPr/>
+        </p:nvSpPr>
+        <p:spPr>
+          <a:xfrm>
+            <a:off x="5074920" y="1481328"/>
+            <a:ext cx="2148840" cy="1965960"/>
+          </a:xfrm>
+          <a:prstGeom prst="roundRect">
+            <a:avLst>
+              <a:gd name="adj" fmla="val 3721"/>
+            </a:avLst>
+          </a:prstGeom>
+          <a:solidFill>
+            <a:srgbClr val="DCFCE7"/>
+          </a:solidFill>
+          <a:ln w="19050">
+            <a:solidFill>
+              <a:srgbClr val="16A34A"/>
+            </a:solidFill>
+            <a:prstDash val="solid"/>
+          </a:ln>
+          <a:effectLst>
+            <a:outerShdw blurRad="12700" dist="50800" dir="2700000" algn="bl" rotWithShape="0">
+              <a:srgbClr val="CBD5E1">
+                <a:alpha val="25000"/>
+              </a:srgbClr>
+            </a:outerShdw>
+          </a:effectLst>
+        </p:spPr>
+        <p:txBody>
+          <a:bodyPr/>
+          <a:lstStyle/>
+          <a:p>
+            <a:endParaRPr lang="en-US"/>
+          </a:p>
+        </p:txBody>
+      </p:sp>
+      <p:sp>
+        <p:nvSpPr>
+          <p:cNvPr id="24" name="Text 22">
+            <a:extLst>
+              <a:ext uri="{FF2B5EF4-FFF2-40B4-BE49-F238E27FC236}">
+                <a16:creationId xmlns:a16="http://schemas.microsoft.com/office/drawing/2014/main" id="{725F5A08-9B1B-73EB-123E-44A1DB9B53A9}"/>
+              </a:ext>
+            </a:extLst>
+          </p:cNvPr>
+          <p:cNvSpPr/>
+          <p:nvPr/>
+        </p:nvSpPr>
+        <p:spPr>
+          <a:xfrm>
+            <a:off x="5212080" y="1645920"/>
+            <a:ext cx="1874520" cy="320040"/>
+          </a:xfrm>
+          <a:prstGeom prst="rect">
+            <a:avLst/>
+          </a:prstGeom>
+          <a:noFill/>
+          <a:ln/>
+        </p:spPr>
+        <p:txBody>
+          <a:bodyPr wrap="square" lIns="0" tIns="0" rIns="0" bIns="0" rtlCol="0" anchor="ctr"/>
+          <a:lstStyle/>
+          <a:p>
+            <a:pPr marL="0" indent="0" algn="ctr">
+              <a:buNone/>
+            </a:pPr>
+            <a:r>
+              <a:rPr lang="en-US" sz="2100" b="1" dirty="0">
+                <a:solidFill>
+                  <a:srgbClr val="14213D"/>
+                </a:solidFill>
+                <a:latin typeface="Aptos Display" pitchFamily="34" charset="0"/>
+                <a:ea typeface="Aptos Display" pitchFamily="34" charset="-122"/>
+                <a:cs typeface="Aptos Display" pitchFamily="34" charset="-120"/>
+              </a:rPr>
+              <a:t>Controller</a:t>
+            </a:r>
+            <a:endParaRPr lang="en-US" sz="2100" dirty="0"/>
+          </a:p>
+        </p:txBody>
+      </p:sp>
+      <p:sp>
+        <p:nvSpPr>
+          <p:cNvPr id="25" name="Text 23">
+            <a:extLst>
+              <a:ext uri="{FF2B5EF4-FFF2-40B4-BE49-F238E27FC236}">
+                <a16:creationId xmlns:a16="http://schemas.microsoft.com/office/drawing/2014/main" id="{573BBCD5-4763-F1BA-C1EB-7E4533A50A0E}"/>
+              </a:ext>
+            </a:extLst>
+          </p:cNvPr>
+          <p:cNvSpPr/>
+          <p:nvPr/>
+        </p:nvSpPr>
+        <p:spPr>
+          <a:xfrm>
+            <a:off x="5303519" y="2194560"/>
+            <a:ext cx="1919939" cy="1124712"/>
+          </a:xfrm>
+          <a:prstGeom prst="rect">
+            <a:avLst/>
+          </a:prstGeom>
+          <a:noFill/>
+          <a:ln/>
+        </p:spPr>
+        <p:txBody>
+          <a:bodyPr wrap="square" lIns="254" tIns="254" rIns="254" bIns="254" rtlCol="0" anchor="ctr">
+            <a:noAutofit/>
+          </a:bodyPr>
+          <a:lstStyle/>
+          <a:p>
+            <a:pPr marL="0" indent="0">
+              <a:buNone/>
+            </a:pPr>
+            <a:r>
+              <a:rPr lang="en-US" sz="1500" dirty="0">
+                <a:solidFill>
+                  <a:srgbClr val="1F2937"/>
+                </a:solidFill>
+                <a:latin typeface="Aptos" pitchFamily="34" charset="0"/>
+                <a:ea typeface="Aptos" pitchFamily="34" charset="-122"/>
+                <a:cs typeface="Aptos" pitchFamily="34" charset="-120"/>
+              </a:rPr>
+              <a:t>• Handles events</a:t>
+            </a:r>
+            <a:endParaRPr lang="en-US" sz="1500" dirty="0"/>
+          </a:p>
+          <a:p>
+            <a:pPr marL="0" indent="0">
+              <a:buNone/>
+            </a:pPr>
+            <a:r>
+              <a:rPr lang="en-US" sz="1500" dirty="0">
+                <a:solidFill>
+                  <a:srgbClr val="1F2937"/>
+                </a:solidFill>
+                <a:latin typeface="Aptos" pitchFamily="34" charset="0"/>
+                <a:ea typeface="Aptos" pitchFamily="34" charset="-122"/>
+                <a:cs typeface="Aptos" pitchFamily="34" charset="-120"/>
+              </a:rPr>
+              <a:t>• Interprets user actions</a:t>
+            </a:r>
+            <a:endParaRPr lang="en-US" sz="1500" dirty="0"/>
+          </a:p>
+          <a:p>
+            <a:pPr marL="0" indent="0">
+              <a:buNone/>
+            </a:pPr>
+            <a:r>
+              <a:rPr lang="en-US" sz="1500" dirty="0">
+                <a:solidFill>
+                  <a:srgbClr val="1F2937"/>
+                </a:solidFill>
+                <a:latin typeface="Aptos" pitchFamily="34" charset="0"/>
+                <a:ea typeface="Aptos" pitchFamily="34" charset="-122"/>
+                <a:cs typeface="Aptos" pitchFamily="34" charset="-120"/>
+              </a:rPr>
+              <a:t>• Calls model operations</a:t>
+            </a:r>
+            <a:endParaRPr lang="en-US" sz="1500" dirty="0"/>
+          </a:p>
+        </p:txBody>
+      </p:sp>
+      <p:sp>
+        <p:nvSpPr>
+          <p:cNvPr id="26" name="Shape 24">
+            <a:extLst>
+              <a:ext uri="{FF2B5EF4-FFF2-40B4-BE49-F238E27FC236}">
+                <a16:creationId xmlns:a16="http://schemas.microsoft.com/office/drawing/2014/main" id="{B3CDF51F-7433-55E7-58FA-26B15603CF2F}"/>
+              </a:ext>
+            </a:extLst>
+          </p:cNvPr>
+          <p:cNvSpPr/>
+          <p:nvPr/>
+        </p:nvSpPr>
+        <p:spPr>
+          <a:xfrm>
+            <a:off x="7955280" y="1481328"/>
+            <a:ext cx="2468880" cy="1965960"/>
+          </a:xfrm>
+          <a:prstGeom prst="roundRect">
+            <a:avLst>
+              <a:gd name="adj" fmla="val 3721"/>
+            </a:avLst>
+          </a:prstGeom>
+          <a:solidFill>
+            <a:srgbClr val="FEF3C7"/>
+          </a:solidFill>
+          <a:ln w="19050">
+            <a:solidFill>
+              <a:srgbClr val="D97706"/>
+            </a:solidFill>
+            <a:prstDash val="solid"/>
+          </a:ln>
+          <a:effectLst>
+            <a:outerShdw blurRad="12700" dist="50800" dir="2700000" algn="bl" rotWithShape="0">
+              <a:srgbClr val="CBD5E1">
+                <a:alpha val="25000"/>
+              </a:srgbClr>
+            </a:outerShdw>
+          </a:effectLst>
+        </p:spPr>
+        <p:txBody>
+          <a:bodyPr/>
+          <a:lstStyle/>
+          <a:p>
+            <a:endParaRPr lang="en-US"/>
+          </a:p>
+        </p:txBody>
+      </p:sp>
+      <p:sp>
+        <p:nvSpPr>
+          <p:cNvPr id="27" name="Text 25">
+            <a:extLst>
+              <a:ext uri="{FF2B5EF4-FFF2-40B4-BE49-F238E27FC236}">
+                <a16:creationId xmlns:a16="http://schemas.microsoft.com/office/drawing/2014/main" id="{90FCF29E-F0CE-5286-41D5-92B85A329D4A}"/>
+              </a:ext>
+            </a:extLst>
+          </p:cNvPr>
+          <p:cNvSpPr/>
+          <p:nvPr/>
+        </p:nvSpPr>
+        <p:spPr>
+          <a:xfrm>
+            <a:off x="8092440" y="1645920"/>
+            <a:ext cx="2194560" cy="320040"/>
+          </a:xfrm>
+          <a:prstGeom prst="rect">
+            <a:avLst/>
+          </a:prstGeom>
+          <a:noFill/>
+          <a:ln/>
+        </p:spPr>
+        <p:txBody>
+          <a:bodyPr wrap="square" lIns="0" tIns="0" rIns="0" bIns="0" rtlCol="0" anchor="ctr"/>
+          <a:lstStyle/>
+          <a:p>
+            <a:pPr marL="0" indent="0" algn="ctr">
+              <a:buNone/>
+            </a:pPr>
+            <a:r>
+              <a:rPr lang="en-US" sz="2100" b="1" dirty="0">
+                <a:solidFill>
+                  <a:srgbClr val="14213D"/>
+                </a:solidFill>
+                <a:latin typeface="Aptos Display" pitchFamily="34" charset="0"/>
+                <a:ea typeface="Aptos Display" pitchFamily="34" charset="-122"/>
+                <a:cs typeface="Aptos Display" pitchFamily="34" charset="-120"/>
+              </a:rPr>
+              <a:t>Model</a:t>
+            </a:r>
+            <a:endParaRPr lang="en-US" sz="2100" dirty="0"/>
+          </a:p>
+        </p:txBody>
+      </p:sp>
+      <p:sp>
+        <p:nvSpPr>
+          <p:cNvPr id="28" name="Text 26">
+            <a:extLst>
+              <a:ext uri="{FF2B5EF4-FFF2-40B4-BE49-F238E27FC236}">
+                <a16:creationId xmlns:a16="http://schemas.microsoft.com/office/drawing/2014/main" id="{920B2B8B-B2E3-D754-6BC7-BF0925F6E606}"/>
+              </a:ext>
+            </a:extLst>
+          </p:cNvPr>
+          <p:cNvSpPr/>
+          <p:nvPr/>
+        </p:nvSpPr>
+        <p:spPr>
+          <a:xfrm>
+            <a:off x="8183879" y="2194560"/>
+            <a:ext cx="2194553" cy="1124712"/>
+          </a:xfrm>
+          <a:prstGeom prst="rect">
+            <a:avLst/>
+          </a:prstGeom>
+          <a:noFill/>
+          <a:ln/>
+        </p:spPr>
+        <p:txBody>
+          <a:bodyPr wrap="square" lIns="254" tIns="254" rIns="254" bIns="254" rtlCol="0" anchor="ctr">
+            <a:noAutofit/>
+          </a:bodyPr>
+          <a:lstStyle/>
+          <a:p>
+            <a:pPr marL="0" indent="0">
+              <a:buNone/>
+            </a:pPr>
+            <a:r>
+              <a:rPr lang="en-US" sz="1500" dirty="0">
+                <a:solidFill>
+                  <a:srgbClr val="1F2937"/>
+                </a:solidFill>
+                <a:latin typeface="Aptos" pitchFamily="34" charset="0"/>
+                <a:ea typeface="Aptos" pitchFamily="34" charset="-122"/>
+                <a:cs typeface="Aptos" pitchFamily="34" charset="-120"/>
+              </a:rPr>
+              <a:t>• Stores application state</a:t>
+            </a:r>
+            <a:endParaRPr lang="en-US" sz="1500" dirty="0"/>
+          </a:p>
+          <a:p>
+            <a:pPr marL="0" indent="0">
+              <a:buNone/>
+            </a:pPr>
+            <a:r>
+              <a:rPr lang="en-US" sz="1500" dirty="0">
+                <a:solidFill>
+                  <a:srgbClr val="1F2937"/>
+                </a:solidFill>
+                <a:latin typeface="Aptos" pitchFamily="34" charset="0"/>
+                <a:ea typeface="Aptos" pitchFamily="34" charset="-122"/>
+                <a:cs typeface="Aptos" pitchFamily="34" charset="-120"/>
+              </a:rPr>
+              <a:t>• Implements rules</a:t>
+            </a:r>
+            <a:endParaRPr lang="en-US" sz="1500" dirty="0"/>
+          </a:p>
+          <a:p>
+            <a:pPr marL="0" indent="0">
+              <a:buNone/>
+            </a:pPr>
+            <a:r>
+              <a:rPr lang="en-US" sz="1500" dirty="0">
+                <a:solidFill>
+                  <a:srgbClr val="1F2937"/>
+                </a:solidFill>
+                <a:latin typeface="Aptos" pitchFamily="34" charset="0"/>
+                <a:ea typeface="Aptos" pitchFamily="34" charset="-122"/>
+                <a:cs typeface="Aptos" pitchFamily="34" charset="-120"/>
+              </a:rPr>
+              <a:t>• Notifies when state changes</a:t>
+            </a:r>
+            <a:endParaRPr lang="en-US" sz="1500" dirty="0"/>
+          </a:p>
+        </p:txBody>
+      </p:sp>
+    </p:spTree>
+    <p:extLst>
+      <p:ext uri="{BB962C8B-B14F-4D97-AF65-F5344CB8AC3E}">
+        <p14:creationId xmlns:p14="http://schemas.microsoft.com/office/powerpoint/2010/main" val="2713643424"/>
+      </p:ext>
+    </p:extLst>
+  </p:cSld>
+  <p:clrMapOvr>
+    <a:masterClrMapping/>
+  </p:clrMapOvr>
+</p:sld>
+</file>
+
 <file path=ppt/slides/slide3.xml><?xml version="1.0" encoding="utf-8"?>
 <p:sld xmlns:a="http://schemas.openxmlformats.org/drawingml/2006/main" xmlns:r="http://schemas.openxmlformats.org/officeDocument/2006/relationships" xmlns:p="http://schemas.openxmlformats.org/presentationml/2006/main">
   <p:cSld>
